--- a/docs/coursework/Презентация_TaskHub.pptx
+++ b/docs/coursework/Презентация_TaskHub.pptx
@@ -3622,7 +3622,7 @@
                 </a:solidFill>
                 <a:latin typeface="Calibri"/>
               </a:rPr>
-              <a:t>UML: Sequence — создание задачи</a:t>
+              <a:t>2.1. Требования к прототипу</a:t>
             </a:r>
           </a:p>
         </p:txBody>
@@ -3700,14 +3700,193 @@
                 </a:solidFill>
                 <a:latin typeface="Calibri"/>
               </a:rPr>
-              <a:t>Синхронный путь HTTP + асинхронные события</a:t>
+              <a:t>Функциональные требования и акторы (UML Use Case)</a:t>
+            </a:r>
+          </a:p>
+        </p:txBody>
+      </p:sp>
+      <p:sp>
+        <p:nvSpPr>
+          <p:cNvPr id="7" name="TextBox 6"/>
+          <p:cNvSpPr txBox="1"/>
+          <p:nvPr/>
+        </p:nvSpPr>
+        <p:spPr>
+          <a:xfrm>
+            <a:off x="324000" y="1044000"/>
+            <a:ext cx="4848529" cy="5418000"/>
+          </a:xfrm>
+          <a:prstGeom prst="rect">
+            <a:avLst/>
+          </a:prstGeom>
+          <a:noFill/>
+        </p:spPr>
+        <p:txBody>
+          <a:bodyPr wrap="square">
+            <a:spAutoFit/>
+          </a:bodyPr>
+          <a:lstStyle/>
+          <a:p>
+            <a:pPr algn="l"/>
+            <a:r>
+              <a:rPr sz="1600" b="1">
+                <a:solidFill>
+                  <a:srgbClr val="0F2D52"/>
+                </a:solidFill>
+                <a:latin typeface="Calibri"/>
+              </a:rPr>
+              <a:t>Функциональные требования</a:t>
+            </a:r>
+          </a:p>
+          <a:p>
+            <a:pPr>
+              <a:spcBef>
+                <a:spcPts val="200"/>
+              </a:spcBef>
+            </a:pPr>
+            <a:r>
+              <a:rPr sz="1300">
+                <a:solidFill>
+                  <a:srgbClr val="1A1F2B"/>
+                </a:solidFill>
+                <a:latin typeface="Calibri"/>
+              </a:rPr>
+              <a:t>•  регистрация и аутентификация (JWT);</a:t>
+            </a:r>
+          </a:p>
+          <a:p>
+            <a:pPr>
+              <a:spcBef>
+                <a:spcPts val="200"/>
+              </a:spcBef>
+            </a:pPr>
+            <a:r>
+              <a:rPr sz="1300">
+                <a:solidFill>
+                  <a:srgbClr val="1A1F2B"/>
+                </a:solidFill>
+                <a:latin typeface="Calibri"/>
+              </a:rPr>
+              <a:t>•  управление арендаторами (tenants);</a:t>
+            </a:r>
+          </a:p>
+          <a:p>
+            <a:pPr>
+              <a:spcBef>
+                <a:spcPts val="200"/>
+              </a:spcBef>
+            </a:pPr>
+            <a:r>
+              <a:rPr sz="1300">
+                <a:solidFill>
+                  <a:srgbClr val="1A1F2B"/>
+                </a:solidFill>
+                <a:latin typeface="Calibri"/>
+              </a:rPr>
+              <a:t>•  проекты, доски (Kanban / Scrum), спринты;</a:t>
+            </a:r>
+          </a:p>
+          <a:p>
+            <a:pPr>
+              <a:spcBef>
+                <a:spcPts val="200"/>
+              </a:spcBef>
+            </a:pPr>
+            <a:r>
+              <a:rPr sz="1300">
+                <a:solidFill>
+                  <a:srgbClr val="1A1F2B"/>
+                </a:solidFill>
+                <a:latin typeface="Calibri"/>
+              </a:rPr>
+              <a:t>•  CRUD задач, комментарии, вложения;</a:t>
+            </a:r>
+          </a:p>
+          <a:p>
+            <a:pPr>
+              <a:spcBef>
+                <a:spcPts val="200"/>
+              </a:spcBef>
+            </a:pPr>
+            <a:r>
+              <a:rPr sz="1300">
+                <a:solidFill>
+                  <a:srgbClr val="1A1F2B"/>
+                </a:solidFill>
+                <a:latin typeface="Calibri"/>
+              </a:rPr>
+              <a:t>•  drag-and-drop по колонкам и спринтам;</a:t>
+            </a:r>
+          </a:p>
+          <a:p>
+            <a:pPr>
+              <a:spcBef>
+                <a:spcPts val="200"/>
+              </a:spcBef>
+            </a:pPr>
+            <a:r>
+              <a:rPr sz="1300">
+                <a:solidFill>
+                  <a:srgbClr val="1A1F2B"/>
+                </a:solidFill>
+                <a:latin typeface="Calibri"/>
+              </a:rPr>
+              <a:t>•  история изменений (audit log);</a:t>
+            </a:r>
+          </a:p>
+          <a:p>
+            <a:pPr>
+              <a:spcBef>
+                <a:spcPts val="200"/>
+              </a:spcBef>
+            </a:pPr>
+            <a:r>
+              <a:rPr sz="1300">
+                <a:solidFill>
+                  <a:srgbClr val="1A1F2B"/>
+                </a:solidFill>
+                <a:latin typeface="Calibri"/>
+              </a:rPr>
+              <a:t>•  полнотекстовый поиск;</a:t>
+            </a:r>
+          </a:p>
+          <a:p>
+            <a:pPr>
+              <a:spcBef>
+                <a:spcPts val="200"/>
+              </a:spcBef>
+            </a:pPr>
+            <a:r>
+              <a:rPr sz="1300">
+                <a:solidFill>
+                  <a:srgbClr val="1A1F2B"/>
+                </a:solidFill>
+                <a:latin typeface="Calibri"/>
+              </a:rPr>
+              <a:t>•  уведомления и e-mail-рассылка;</a:t>
+            </a:r>
+          </a:p>
+          <a:p>
+            <a:pPr>
+              <a:spcBef>
+                <a:spcPts val="200"/>
+              </a:spcBef>
+            </a:pPr>
+            <a:r>
+              <a:rPr sz="1300">
+                <a:solidFill>
+                  <a:srgbClr val="1A1F2B"/>
+                </a:solidFill>
+                <a:latin typeface="Calibri"/>
+              </a:rPr>
+              <a:t>•  REST API + WebSocket-обновления.</a:t>
             </a:r>
           </a:p>
         </p:txBody>
       </p:sp>
       <p:pic>
         <p:nvPicPr>
-          <p:cNvPr id="7" name="Picture 6" descr="sequence-create-issue.png"/>
+          <p:cNvPr id="8" name="Picture 7" descr="use-case.png"/>
           <p:cNvPicPr>
             <a:picLocks noChangeAspect="1"/>
           </p:cNvPicPr>
@@ -3721,101 +3900,14 @@
         </p:blipFill>
         <p:spPr>
           <a:xfrm>
-            <a:off x="324000" y="1044000"/>
-            <a:ext cx="6926471" cy="5418000"/>
+            <a:off x="5518853" y="1044000"/>
+            <a:ext cx="6349265" cy="5418000"/>
           </a:xfrm>
           <a:prstGeom prst="rect">
             <a:avLst/>
           </a:prstGeom>
         </p:spPr>
       </p:pic>
-      <p:sp>
-        <p:nvSpPr>
-          <p:cNvPr id="8" name="TextBox 7"/>
-          <p:cNvSpPr txBox="1"/>
-          <p:nvPr/>
-        </p:nvSpPr>
-        <p:spPr>
-          <a:xfrm>
-            <a:off x="7466471" y="1116000"/>
-            <a:ext cx="4401647" cy="5274000"/>
-          </a:xfrm>
-          <a:prstGeom prst="rect">
-            <a:avLst/>
-          </a:prstGeom>
-          <a:noFill/>
-        </p:spPr>
-        <p:txBody>
-          <a:bodyPr wrap="square">
-            <a:spAutoFit/>
-          </a:bodyPr>
-          <a:lstStyle/>
-          <a:p>
-            <a:pPr algn="l">
-              <a:spcAft>
-                <a:spcPts val="600"/>
-              </a:spcAft>
-            </a:pPr>
-            <a:r>
-              <a:rPr sz="1500">
-                <a:solidFill>
-                  <a:srgbClr val="1A1F2B"/>
-                </a:solidFill>
-                <a:latin typeface="Calibri"/>
-              </a:rPr>
-              <a:t>•  Web-клиент → Controller → Service → Repository → PostgreSQL.</a:t>
-            </a:r>
-          </a:p>
-          <a:p>
-            <a:pPr algn="l">
-              <a:spcAft>
-                <a:spcPts val="600"/>
-              </a:spcAft>
-            </a:pPr>
-            <a:r>
-              <a:rPr sz="1500">
-                <a:solidFill>
-                  <a:srgbClr val="1A1F2B"/>
-                </a:solidFill>
-                <a:latin typeface="Calibri"/>
-              </a:rPr>
-              <a:t>•  Транзакция вставки задачи и записи в issue_changelog.</a:t>
-            </a:r>
-          </a:p>
-          <a:p>
-            <a:pPr algn="l">
-              <a:spcAft>
-                <a:spcPts val="600"/>
-              </a:spcAft>
-            </a:pPr>
-            <a:r>
-              <a:rPr sz="1500">
-                <a:solidFill>
-                  <a:srgbClr val="1A1F2B"/>
-                </a:solidFill>
-                <a:latin typeface="Calibri"/>
-              </a:rPr>
-              <a:t>•  EventEmitter публикует issue.created для подписчиков.</a:t>
-            </a:r>
-          </a:p>
-          <a:p>
-            <a:pPr algn="l">
-              <a:spcAft>
-                <a:spcPts val="600"/>
-              </a:spcAft>
-            </a:pPr>
-            <a:r>
-              <a:rPr sz="1500">
-                <a:solidFill>
-                  <a:srgbClr val="1A1F2B"/>
-                </a:solidFill>
-                <a:latin typeface="Calibri"/>
-              </a:rPr>
-              <a:t>•  WebSocket-шлюз и Notifications обрабатывают событие асинхронно.</a:t>
-            </a:r>
-          </a:p>
-        </p:txBody>
-      </p:sp>
       <p:sp>
         <p:nvSpPr>
           <p:cNvPr id="9" name="TextBox 8"/>
@@ -4021,7 +4113,7 @@
                 </a:solidFill>
                 <a:latin typeface="Calibri"/>
               </a:rPr>
-              <a:t>UML: State — жизненный цикл задачи</a:t>
+              <a:t>Архитектура прототипа TaskHub</a:t>
             </a:r>
           </a:p>
         </p:txBody>
@@ -4099,14 +4191,117 @@
                 </a:solidFill>
                 <a:latin typeface="Calibri"/>
               </a:rPr>
-              <a:t>Конечный автомат IssueStatus</a:t>
+              <a:t>Трёхуровневая SPA-архитектура с асинхронной шиной событий</a:t>
+            </a:r>
+          </a:p>
+        </p:txBody>
+      </p:sp>
+      <p:sp>
+        <p:nvSpPr>
+          <p:cNvPr id="7" name="TextBox 6"/>
+          <p:cNvSpPr txBox="1"/>
+          <p:nvPr/>
+        </p:nvSpPr>
+        <p:spPr>
+          <a:xfrm>
+            <a:off x="324000" y="1044000"/>
+            <a:ext cx="5772059" cy="5418000"/>
+          </a:xfrm>
+          <a:prstGeom prst="rect">
+            <a:avLst/>
+          </a:prstGeom>
+          <a:noFill/>
+        </p:spPr>
+        <p:txBody>
+          <a:bodyPr wrap="square">
+            <a:spAutoFit/>
+          </a:bodyPr>
+          <a:lstStyle/>
+          <a:p>
+            <a:pPr algn="l">
+              <a:spcAft>
+                <a:spcPts val="600"/>
+              </a:spcAft>
+            </a:pPr>
+            <a:r>
+              <a:rPr sz="1700">
+                <a:solidFill>
+                  <a:srgbClr val="1A1F2B"/>
+                </a:solidFill>
+                <a:latin typeface="Calibri"/>
+              </a:rPr>
+              <a:t>•  Frontend: React 18 + Vite + TanStack Query + Zustand.</a:t>
+            </a:r>
+          </a:p>
+          <a:p>
+            <a:pPr algn="l">
+              <a:spcAft>
+                <a:spcPts val="600"/>
+              </a:spcAft>
+            </a:pPr>
+            <a:r>
+              <a:rPr sz="1700">
+                <a:solidFill>
+                  <a:srgbClr val="1A1F2B"/>
+                </a:solidFill>
+                <a:latin typeface="Calibri"/>
+              </a:rPr>
+              <a:t>•  Backend: NestJS + TypeORM, 9 модулей (Auth, Tenants, Users, Projects, Issues, Search, Notifications, Mail, Health).</a:t>
+            </a:r>
+          </a:p>
+          <a:p>
+            <a:pPr algn="l">
+              <a:spcAft>
+                <a:spcPts val="600"/>
+              </a:spcAft>
+            </a:pPr>
+            <a:r>
+              <a:rPr sz="1700">
+                <a:solidFill>
+                  <a:srgbClr val="1A1F2B"/>
+                </a:solidFill>
+                <a:latin typeface="Calibri"/>
+              </a:rPr>
+              <a:t>•  Хранилища: PostgreSQL 16 (RLS), Redis (кеш и pub/sub), MinIO (вложения).</a:t>
+            </a:r>
+          </a:p>
+          <a:p>
+            <a:pPr algn="l">
+              <a:spcAft>
+                <a:spcPts val="600"/>
+              </a:spcAft>
+            </a:pPr>
+            <a:r>
+              <a:rPr sz="1700">
+                <a:solidFill>
+                  <a:srgbClr val="1A1F2B"/>
+                </a:solidFill>
+                <a:latin typeface="Calibri"/>
+              </a:rPr>
+              <a:t>•  Реал-тайм: WebSocket (Socket.IO) + EventEmitter для развязки слоёв.</a:t>
+            </a:r>
+          </a:p>
+          <a:p>
+            <a:pPr algn="l">
+              <a:spcAft>
+                <a:spcPts val="600"/>
+              </a:spcAft>
+            </a:pPr>
+            <a:r>
+              <a:rPr sz="1700">
+                <a:solidFill>
+                  <a:srgbClr val="1A1F2B"/>
+                </a:solidFill>
+                <a:latin typeface="Calibri"/>
+              </a:rPr>
+              <a:t>•  Развёртывание: Docker Compose, обратный прокси Traefik.</a:t>
             </a:r>
           </a:p>
         </p:txBody>
       </p:sp>
       <p:pic>
         <p:nvPicPr>
-          <p:cNvPr id="7" name="Picture 6" descr="state-issue.png"/>
+          <p:cNvPr id="8" name="Picture 7" descr="component.png"/>
           <p:cNvPicPr>
             <a:picLocks noChangeAspect="1"/>
           </p:cNvPicPr>
@@ -4120,101 +4315,14 @@
         </p:blipFill>
         <p:spPr>
           <a:xfrm>
-            <a:off x="324000" y="1044000"/>
-            <a:ext cx="6926471" cy="5418000"/>
+            <a:off x="6673265" y="1044000"/>
+            <a:ext cx="5194853" cy="5418000"/>
           </a:xfrm>
           <a:prstGeom prst="rect">
             <a:avLst/>
           </a:prstGeom>
         </p:spPr>
       </p:pic>
-      <p:sp>
-        <p:nvSpPr>
-          <p:cNvPr id="8" name="TextBox 7"/>
-          <p:cNvSpPr txBox="1"/>
-          <p:nvPr/>
-        </p:nvSpPr>
-        <p:spPr>
-          <a:xfrm>
-            <a:off x="7466471" y="1116000"/>
-            <a:ext cx="4401647" cy="5274000"/>
-          </a:xfrm>
-          <a:prstGeom prst="rect">
-            <a:avLst/>
-          </a:prstGeom>
-          <a:noFill/>
-        </p:spPr>
-        <p:txBody>
-          <a:bodyPr wrap="square">
-            <a:spAutoFit/>
-          </a:bodyPr>
-          <a:lstStyle/>
-          <a:p>
-            <a:pPr algn="l">
-              <a:spcAft>
-                <a:spcPts val="600"/>
-              </a:spcAft>
-            </a:pPr>
-            <a:r>
-              <a:rPr sz="1500">
-                <a:solidFill>
-                  <a:srgbClr val="1A1F2B"/>
-                </a:solidFill>
-                <a:latin typeface="Calibri"/>
-              </a:rPr>
-              <a:t>•  6 состояний: BACKLOG → TODO → IN_PROGRESS → IN_REVIEW → DONE / CANCELLED.</a:t>
-            </a:r>
-          </a:p>
-          <a:p>
-            <a:pPr algn="l">
-              <a:spcAft>
-                <a:spcPts val="600"/>
-              </a:spcAft>
-            </a:pPr>
-            <a:r>
-              <a:rPr sz="1500">
-                <a:solidFill>
-                  <a:srgbClr val="1A1F2B"/>
-                </a:solidFill>
-                <a:latin typeface="Calibri"/>
-              </a:rPr>
-              <a:t>•  Каждый переход — действие в API (start, submitForReview, approve, reject, …).</a:t>
-            </a:r>
-          </a:p>
-          <a:p>
-            <a:pPr algn="l">
-              <a:spcAft>
-                <a:spcPts val="600"/>
-              </a:spcAft>
-            </a:pPr>
-            <a:r>
-              <a:rPr sz="1500">
-                <a:solidFill>
-                  <a:srgbClr val="1A1F2B"/>
-                </a:solidFill>
-                <a:latin typeface="Calibri"/>
-              </a:rPr>
-              <a:t>•  Защита от недопустимых переходов на уровне сервисного слоя.</a:t>
-            </a:r>
-          </a:p>
-          <a:p>
-            <a:pPr algn="l">
-              <a:spcAft>
-                <a:spcPts val="600"/>
-              </a:spcAft>
-            </a:pPr>
-            <a:r>
-              <a:rPr sz="1500">
-                <a:solidFill>
-                  <a:srgbClr val="1A1F2B"/>
-                </a:solidFill>
-                <a:latin typeface="Calibri"/>
-              </a:rPr>
-              <a:t>•  Все переходы попадают в issue_changelog для аудита.</a:t>
-            </a:r>
-          </a:p>
-        </p:txBody>
-      </p:sp>
       <p:sp>
         <p:nvSpPr>
           <p:cNvPr id="9" name="TextBox 8"/>
@@ -4420,7 +4528,7 @@
                 </a:solidFill>
                 <a:latin typeface="Calibri"/>
               </a:rPr>
-              <a:t>UML: Deployment</a:t>
+              <a:t>2.3. Доменная модель (UML Class)</a:t>
             </a:r>
           </a:p>
         </p:txBody>
@@ -4498,14 +4606,14 @@
                 </a:solidFill>
                 <a:latin typeface="Calibri"/>
               </a:rPr>
-              <a:t>Топология контейнеров Docker Compose</a:t>
+              <a:t>11 сущностей и 5 перечислений TaskHub</a:t>
             </a:r>
           </a:p>
         </p:txBody>
       </p:sp>
       <p:pic>
         <p:nvPicPr>
-          <p:cNvPr id="7" name="Picture 6" descr="deployment.png"/>
+          <p:cNvPr id="7" name="Picture 6" descr="class.png"/>
           <p:cNvPicPr>
             <a:picLocks noChangeAspect="1"/>
           </p:cNvPicPr>
@@ -4561,7 +4669,7 @@
                 </a:solidFill>
                 <a:latin typeface="Calibri"/>
               </a:rPr>
-              <a:t>•  7 контейнеров: traefik, web, api, postgres, redis, minio, adminer.</a:t>
+              <a:t>•  Tenant, User, Project, Sprint, Issue, Comment, Attachment …</a:t>
             </a:r>
           </a:p>
           <a:p>
@@ -4577,7 +4685,7 @@
                 </a:solidFill>
                 <a:latin typeface="Calibri"/>
               </a:rPr>
-              <a:t>•  Traefik принимает HTTPS, маршрутизирует / в SPA, /api в NestJS.</a:t>
+              <a:t>•  Перечисления: UserRole, IssueStatus, IssuePriority, BoardType.</a:t>
             </a:r>
           </a:p>
           <a:p>
@@ -4593,7 +4701,7 @@
                 </a:solidFill>
                 <a:latin typeface="Calibri"/>
               </a:rPr>
-              <a:t>•  Состояние БД и MinIO смонтировано через volumes.</a:t>
+              <a:t>•  Композиция Tenant → Project → Issue фиксирует владение.</a:t>
             </a:r>
           </a:p>
           <a:p>
@@ -4609,7 +4717,7 @@
                 </a:solidFill>
                 <a:latin typeface="Calibri"/>
               </a:rPr>
-              <a:t>•  Конфигурация описана в инфраструктурных файлах репозитория.</a:t>
+              <a:t>•  Соответствует TypeORM-сущностям backend-модулей.</a:t>
             </a:r>
           </a:p>
         </p:txBody>
@@ -4819,7 +4927,7 @@
                 </a:solidFill>
                 <a:latin typeface="Calibri"/>
               </a:rPr>
-              <a:t>Технологический стек</a:t>
+              <a:t>Модель данных и многоарендность</a:t>
             </a:r>
           </a:p>
         </p:txBody>
@@ -4897,109 +5005,45 @@
                 </a:solidFill>
                 <a:latin typeface="Calibri"/>
               </a:rPr>
-              <a:t>Обоснованный выбор зрелых open-source инструментов</a:t>
-            </a:r>
-          </a:p>
-        </p:txBody>
-      </p:sp>
-      <p:sp>
-        <p:nvSpPr>
-          <p:cNvPr id="7" name="Rounded Rectangle 6"/>
-          <p:cNvSpPr/>
-          <p:nvPr/>
-        </p:nvSpPr>
+              <a:t>ER-схема и изоляция через Row-Level Security</a:t>
+            </a:r>
+          </a:p>
+        </p:txBody>
+      </p:sp>
+      <p:pic>
+        <p:nvPicPr>
+          <p:cNvPr id="7" name="Picture 6" descr="er.png"/>
+          <p:cNvPicPr>
+            <a:picLocks noChangeAspect="1"/>
+          </p:cNvPicPr>
+          <p:nvPr/>
+        </p:nvPicPr>
+        <p:blipFill>
+          <a:blip r:embed="rId2"/>
+          <a:stretch>
+            <a:fillRect/>
+          </a:stretch>
+        </p:blipFill>
         <p:spPr>
           <a:xfrm>
             <a:off x="324000" y="1044000"/>
-            <a:ext cx="3728039" cy="4876200"/>
-          </a:xfrm>
-          <a:prstGeom prst="roundRect">
-            <a:avLst>
-              <a:gd name="adj" fmla="val 5000"/>
-            </a:avLst>
-          </a:prstGeom>
-          <a:solidFill>
-            <a:srgbClr val="F2F5F9"/>
-          </a:solidFill>
-          <a:ln>
-            <a:noFill/>
-          </a:ln>
-        </p:spPr>
-        <p:style>
-          <a:lnRef idx="1">
-            <a:schemeClr val="accent1"/>
-          </a:lnRef>
-          <a:fillRef idx="3">
-            <a:schemeClr val="accent1"/>
-          </a:fillRef>
-          <a:effectRef idx="2">
-            <a:schemeClr val="accent1"/>
-          </a:effectRef>
-          <a:fontRef idx="minor">
-            <a:schemeClr val="lt1"/>
-          </a:fontRef>
-        </p:style>
-        <p:txBody>
-          <a:bodyPr rtlCol="0" anchor="ctr"/>
-          <a:lstStyle/>
-          <a:p>
-            <a:pPr algn="ctr"/>
-          </a:p>
-        </p:txBody>
-      </p:sp>
-      <p:sp>
-        <p:nvSpPr>
-          <p:cNvPr id="8" name="Rectangle 7"/>
-          <p:cNvSpPr/>
-          <p:nvPr/>
-        </p:nvSpPr>
-        <p:spPr>
-          <a:xfrm>
-            <a:off x="324000" y="1044000"/>
-            <a:ext cx="3728039" cy="251999"/>
-          </a:xfrm>
-          <a:prstGeom prst="rect">
-            <a:avLst/>
-          </a:prstGeom>
-          <a:solidFill>
-            <a:srgbClr val="1F77B4"/>
-          </a:solidFill>
-          <a:ln>
-            <a:noFill/>
-          </a:ln>
-        </p:spPr>
-        <p:style>
-          <a:lnRef idx="1">
-            <a:schemeClr val="accent1"/>
-          </a:lnRef>
-          <a:fillRef idx="3">
-            <a:schemeClr val="accent1"/>
-          </a:fillRef>
-          <a:effectRef idx="2">
-            <a:schemeClr val="accent1"/>
-          </a:effectRef>
-          <a:fontRef idx="minor">
-            <a:schemeClr val="lt1"/>
-          </a:fontRef>
-        </p:style>
-        <p:txBody>
-          <a:bodyPr rtlCol="0" anchor="ctr"/>
-          <a:lstStyle/>
-          <a:p>
-            <a:pPr algn="ctr"/>
-          </a:p>
-        </p:txBody>
-      </p:sp>
-      <p:sp>
-        <p:nvSpPr>
-          <p:cNvPr id="9" name="TextBox 8"/>
+            <a:ext cx="7157353" cy="5418000"/>
+          </a:xfrm>
+          <a:prstGeom prst="rect">
+            <a:avLst/>
+          </a:prstGeom>
+        </p:spPr>
+      </p:pic>
+      <p:sp>
+        <p:nvSpPr>
+          <p:cNvPr id="8" name="TextBox 7"/>
           <p:cNvSpPr txBox="1"/>
           <p:nvPr/>
         </p:nvSpPr>
         <p:spPr>
           <a:xfrm>
-            <a:off x="432000" y="1080000"/>
-            <a:ext cx="3512039" cy="216000"/>
+            <a:off x="7827677" y="1116000"/>
+            <a:ext cx="4040441" cy="5274000"/>
           </a:xfrm>
           <a:prstGeom prst="rect">
             <a:avLst/>
@@ -5012,625 +5056,90 @@
           </a:bodyPr>
           <a:lstStyle/>
           <a:p>
-            <a:pPr algn="l"/>
-            <a:r>
-              <a:rPr sz="1600" b="1">
-                <a:solidFill>
-                  <a:srgbClr val="FFFFFF"/>
-                </a:solidFill>
-                <a:latin typeface="Calibri"/>
-              </a:rPr>
-              <a:t>Frontend</a:t>
-            </a:r>
-          </a:p>
-        </p:txBody>
-      </p:sp>
-      <p:sp>
-        <p:nvSpPr>
-          <p:cNvPr id="10" name="TextBox 9"/>
-          <p:cNvSpPr txBox="1"/>
-          <p:nvPr/>
-        </p:nvSpPr>
-        <p:spPr>
-          <a:xfrm>
-            <a:off x="468000" y="1440000"/>
-            <a:ext cx="3440039" cy="4372201"/>
-          </a:xfrm>
-          <a:prstGeom prst="rect">
-            <a:avLst/>
-          </a:prstGeom>
-          <a:noFill/>
-        </p:spPr>
-        <p:txBody>
-          <a:bodyPr wrap="square">
-            <a:spAutoFit/>
-          </a:bodyPr>
-          <a:lstStyle/>
-          <a:p>
-            <a:pPr>
+            <a:pPr algn="l">
               <a:spcAft>
-                <a:spcPts val="400"/>
+                <a:spcPts val="600"/>
               </a:spcAft>
             </a:pPr>
             <a:r>
-              <a:rPr sz="1600">
+              <a:rPr sz="1500">
                 <a:solidFill>
                   <a:srgbClr val="1A1F2B"/>
                 </a:solidFill>
                 <a:latin typeface="Calibri"/>
               </a:rPr>
-              <a:t>•  React 18</a:t>
-            </a:r>
-          </a:p>
-          <a:p>
-            <a:pPr>
+              <a:t>•  12 таблиц, все доменные сущности привязаны к tenants(id).</a:t>
+            </a:r>
+          </a:p>
+          <a:p>
+            <a:pPr algn="l">
               <a:spcAft>
-                <a:spcPts val="400"/>
+                <a:spcPts val="600"/>
               </a:spcAft>
             </a:pPr>
             <a:r>
-              <a:rPr sz="1600">
+              <a:rPr sz="1500">
                 <a:solidFill>
                   <a:srgbClr val="1A1F2B"/>
                 </a:solidFill>
                 <a:latin typeface="Calibri"/>
               </a:rPr>
-              <a:t>•  TypeScript</a:t>
-            </a:r>
-          </a:p>
-          <a:p>
-            <a:pPr>
+              <a:t>•  tenant_id обязателен и индексирован — без него любой запрос отклоняется RLS-политикой.</a:t>
+            </a:r>
+          </a:p>
+          <a:p>
+            <a:pPr algn="l">
               <a:spcAft>
-                <a:spcPts val="400"/>
+                <a:spcPts val="600"/>
               </a:spcAft>
             </a:pPr>
             <a:r>
-              <a:rPr sz="1600">
+              <a:rPr sz="1500">
                 <a:solidFill>
                   <a:srgbClr val="1A1F2B"/>
                 </a:solidFill>
                 <a:latin typeface="Calibri"/>
               </a:rPr>
-              <a:t>•  Vite</a:t>
-            </a:r>
-          </a:p>
-          <a:p>
-            <a:pPr>
+              <a:t>•  UUID-первичные ключи, FK с ON DELETE CASCADE для целостности.</a:t>
+            </a:r>
+          </a:p>
+          <a:p>
+            <a:pPr algn="l">
               <a:spcAft>
-                <a:spcPts val="400"/>
+                <a:spcPts val="600"/>
               </a:spcAft>
             </a:pPr>
             <a:r>
-              <a:rPr sz="1600">
+              <a:rPr sz="1500">
                 <a:solidFill>
                   <a:srgbClr val="1A1F2B"/>
                 </a:solidFill>
                 <a:latin typeface="Calibri"/>
               </a:rPr>
-              <a:t>•  TanStack Query</a:t>
-            </a:r>
-          </a:p>
-          <a:p>
-            <a:pPr>
+              <a:t>•  Полнотекстовый поиск по issues через tsvector + GIN-индекс.</a:t>
+            </a:r>
+          </a:p>
+          <a:p>
+            <a:pPr algn="l">
               <a:spcAft>
-                <a:spcPts val="400"/>
+                <a:spcPts val="600"/>
               </a:spcAft>
             </a:pPr>
             <a:r>
-              <a:rPr sz="1600">
+              <a:rPr sz="1500">
                 <a:solidFill>
                   <a:srgbClr val="1A1F2B"/>
                 </a:solidFill>
                 <a:latin typeface="Calibri"/>
               </a:rPr>
-              <a:t>•  Zustand</a:t>
-            </a:r>
-          </a:p>
-          <a:p>
-            <a:pPr>
-              <a:spcAft>
-                <a:spcPts val="400"/>
-              </a:spcAft>
-            </a:pPr>
-            <a:r>
-              <a:rPr sz="1600">
-                <a:solidFill>
-                  <a:srgbClr val="1A1F2B"/>
-                </a:solidFill>
-                <a:latin typeface="Calibri"/>
-              </a:rPr>
-              <a:t>•  Tailwind CSS</a:t>
-            </a:r>
-          </a:p>
-        </p:txBody>
-      </p:sp>
-      <p:sp>
-        <p:nvSpPr>
-          <p:cNvPr id="11" name="Rounded Rectangle 10"/>
-          <p:cNvSpPr/>
-          <p:nvPr/>
-        </p:nvSpPr>
-        <p:spPr>
-          <a:xfrm>
-            <a:off x="4232039" y="1044000"/>
-            <a:ext cx="3728039" cy="4876200"/>
-          </a:xfrm>
-          <a:prstGeom prst="roundRect">
-            <a:avLst>
-              <a:gd name="adj" fmla="val 5000"/>
-            </a:avLst>
-          </a:prstGeom>
-          <a:solidFill>
-            <a:srgbClr val="F2F5F9"/>
-          </a:solidFill>
-          <a:ln>
-            <a:noFill/>
-          </a:ln>
-        </p:spPr>
-        <p:style>
-          <a:lnRef idx="1">
-            <a:schemeClr val="accent1"/>
-          </a:lnRef>
-          <a:fillRef idx="3">
-            <a:schemeClr val="accent1"/>
-          </a:fillRef>
-          <a:effectRef idx="2">
-            <a:schemeClr val="accent1"/>
-          </a:effectRef>
-          <a:fontRef idx="minor">
-            <a:schemeClr val="lt1"/>
-          </a:fontRef>
-        </p:style>
-        <p:txBody>
-          <a:bodyPr rtlCol="0" anchor="ctr"/>
-          <a:lstStyle/>
-          <a:p>
-            <a:pPr algn="ctr"/>
-          </a:p>
-        </p:txBody>
-      </p:sp>
-      <p:sp>
-        <p:nvSpPr>
-          <p:cNvPr id="12" name="Rectangle 11"/>
-          <p:cNvSpPr/>
-          <p:nvPr/>
-        </p:nvSpPr>
-        <p:spPr>
-          <a:xfrm>
-            <a:off x="4232039" y="1044000"/>
-            <a:ext cx="3728039" cy="251999"/>
-          </a:xfrm>
-          <a:prstGeom prst="rect">
-            <a:avLst/>
-          </a:prstGeom>
-          <a:solidFill>
-            <a:srgbClr val="0F2D52"/>
-          </a:solidFill>
-          <a:ln>
-            <a:noFill/>
-          </a:ln>
-        </p:spPr>
-        <p:style>
-          <a:lnRef idx="1">
-            <a:schemeClr val="accent1"/>
-          </a:lnRef>
-          <a:fillRef idx="3">
-            <a:schemeClr val="accent1"/>
-          </a:fillRef>
-          <a:effectRef idx="2">
-            <a:schemeClr val="accent1"/>
-          </a:effectRef>
-          <a:fontRef idx="minor">
-            <a:schemeClr val="lt1"/>
-          </a:fontRef>
-        </p:style>
-        <p:txBody>
-          <a:bodyPr rtlCol="0" anchor="ctr"/>
-          <a:lstStyle/>
-          <a:p>
-            <a:pPr algn="ctr"/>
-          </a:p>
-        </p:txBody>
-      </p:sp>
-      <p:sp>
-        <p:nvSpPr>
-          <p:cNvPr id="13" name="TextBox 12"/>
-          <p:cNvSpPr txBox="1"/>
-          <p:nvPr/>
-        </p:nvSpPr>
-        <p:spPr>
-          <a:xfrm>
-            <a:off x="4340039" y="1080000"/>
-            <a:ext cx="3512039" cy="216000"/>
-          </a:xfrm>
-          <a:prstGeom prst="rect">
-            <a:avLst/>
-          </a:prstGeom>
-          <a:noFill/>
-        </p:spPr>
-        <p:txBody>
-          <a:bodyPr wrap="square">
-            <a:spAutoFit/>
-          </a:bodyPr>
-          <a:lstStyle/>
-          <a:p>
-            <a:pPr algn="l"/>
-            <a:r>
-              <a:rPr sz="1600" b="1">
-                <a:solidFill>
-                  <a:srgbClr val="FFFFFF"/>
-                </a:solidFill>
-                <a:latin typeface="Calibri"/>
-              </a:rPr>
-              <a:t>Backend</a:t>
-            </a:r>
-          </a:p>
-        </p:txBody>
-      </p:sp>
-      <p:sp>
-        <p:nvSpPr>
-          <p:cNvPr id="14" name="TextBox 13"/>
-          <p:cNvSpPr txBox="1"/>
-          <p:nvPr/>
-        </p:nvSpPr>
-        <p:spPr>
-          <a:xfrm>
-            <a:off x="4376039" y="1440000"/>
-            <a:ext cx="3440039" cy="4372201"/>
-          </a:xfrm>
-          <a:prstGeom prst="rect">
-            <a:avLst/>
-          </a:prstGeom>
-          <a:noFill/>
-        </p:spPr>
-        <p:txBody>
-          <a:bodyPr wrap="square">
-            <a:spAutoFit/>
-          </a:bodyPr>
-          <a:lstStyle/>
-          <a:p>
-            <a:pPr>
-              <a:spcAft>
-                <a:spcPts val="400"/>
-              </a:spcAft>
-            </a:pPr>
-            <a:r>
-              <a:rPr sz="1600">
-                <a:solidFill>
-                  <a:srgbClr val="1A1F2B"/>
-                </a:solidFill>
-                <a:latin typeface="Calibri"/>
-              </a:rPr>
-              <a:t>•  NestJS 10</a:t>
-            </a:r>
-          </a:p>
-          <a:p>
-            <a:pPr>
-              <a:spcAft>
-                <a:spcPts val="400"/>
-              </a:spcAft>
-            </a:pPr>
-            <a:r>
-              <a:rPr sz="1600">
-                <a:solidFill>
-                  <a:srgbClr val="1A1F2B"/>
-                </a:solidFill>
-                <a:latin typeface="Calibri"/>
-              </a:rPr>
-              <a:t>•  TypeORM</a:t>
-            </a:r>
-          </a:p>
-          <a:p>
-            <a:pPr>
-              <a:spcAft>
-                <a:spcPts val="400"/>
-              </a:spcAft>
-            </a:pPr>
-            <a:r>
-              <a:rPr sz="1600">
-                <a:solidFill>
-                  <a:srgbClr val="1A1F2B"/>
-                </a:solidFill>
-                <a:latin typeface="Calibri"/>
-              </a:rPr>
-              <a:t>•  class-validator</a:t>
-            </a:r>
-          </a:p>
-          <a:p>
-            <a:pPr>
-              <a:spcAft>
-                <a:spcPts val="400"/>
-              </a:spcAft>
-            </a:pPr>
-            <a:r>
-              <a:rPr sz="1600">
-                <a:solidFill>
-                  <a:srgbClr val="1A1F2B"/>
-                </a:solidFill>
-                <a:latin typeface="Calibri"/>
-              </a:rPr>
-              <a:t>•  Passport JWT</a:t>
-            </a:r>
-          </a:p>
-          <a:p>
-            <a:pPr>
-              <a:spcAft>
-                <a:spcPts val="400"/>
-              </a:spcAft>
-            </a:pPr>
-            <a:r>
-              <a:rPr sz="1600">
-                <a:solidFill>
-                  <a:srgbClr val="1A1F2B"/>
-                </a:solidFill>
-                <a:latin typeface="Calibri"/>
-              </a:rPr>
-              <a:t>•  Socket.IO</a:t>
-            </a:r>
-          </a:p>
-          <a:p>
-            <a:pPr>
-              <a:spcAft>
-                <a:spcPts val="400"/>
-              </a:spcAft>
-            </a:pPr>
-            <a:r>
-              <a:rPr sz="1600">
-                <a:solidFill>
-                  <a:srgbClr val="1A1F2B"/>
-                </a:solidFill>
-                <a:latin typeface="Calibri"/>
-              </a:rPr>
-              <a:t>•  BullMQ</a:t>
-            </a:r>
-          </a:p>
-        </p:txBody>
-      </p:sp>
-      <p:sp>
-        <p:nvSpPr>
-          <p:cNvPr id="15" name="Rounded Rectangle 14"/>
-          <p:cNvSpPr/>
-          <p:nvPr/>
-        </p:nvSpPr>
-        <p:spPr>
-          <a:xfrm>
-            <a:off x="8140079" y="1044000"/>
-            <a:ext cx="3728039" cy="4876200"/>
-          </a:xfrm>
-          <a:prstGeom prst="roundRect">
-            <a:avLst>
-              <a:gd name="adj" fmla="val 5000"/>
-            </a:avLst>
-          </a:prstGeom>
-          <a:solidFill>
-            <a:srgbClr val="F2F5F9"/>
-          </a:solidFill>
-          <a:ln>
-            <a:noFill/>
-          </a:ln>
-        </p:spPr>
-        <p:style>
-          <a:lnRef idx="1">
-            <a:schemeClr val="accent1"/>
-          </a:lnRef>
-          <a:fillRef idx="3">
-            <a:schemeClr val="accent1"/>
-          </a:fillRef>
-          <a:effectRef idx="2">
-            <a:schemeClr val="accent1"/>
-          </a:effectRef>
-          <a:fontRef idx="minor">
-            <a:schemeClr val="lt1"/>
-          </a:fontRef>
-        </p:style>
-        <p:txBody>
-          <a:bodyPr rtlCol="0" anchor="ctr"/>
-          <a:lstStyle/>
-          <a:p>
-            <a:pPr algn="ctr"/>
-          </a:p>
-        </p:txBody>
-      </p:sp>
-      <p:sp>
-        <p:nvSpPr>
-          <p:cNvPr id="16" name="Rectangle 15"/>
-          <p:cNvSpPr/>
-          <p:nvPr/>
-        </p:nvSpPr>
-        <p:spPr>
-          <a:xfrm>
-            <a:off x="8140079" y="1044000"/>
-            <a:ext cx="3728039" cy="251999"/>
-          </a:xfrm>
-          <a:prstGeom prst="rect">
-            <a:avLst/>
-          </a:prstGeom>
-          <a:solidFill>
-            <a:srgbClr val="555C66"/>
-          </a:solidFill>
-          <a:ln>
-            <a:noFill/>
-          </a:ln>
-        </p:spPr>
-        <p:style>
-          <a:lnRef idx="1">
-            <a:schemeClr val="accent1"/>
-          </a:lnRef>
-          <a:fillRef idx="3">
-            <a:schemeClr val="accent1"/>
-          </a:fillRef>
-          <a:effectRef idx="2">
-            <a:schemeClr val="accent1"/>
-          </a:effectRef>
-          <a:fontRef idx="minor">
-            <a:schemeClr val="lt1"/>
-          </a:fontRef>
-        </p:style>
-        <p:txBody>
-          <a:bodyPr rtlCol="0" anchor="ctr"/>
-          <a:lstStyle/>
-          <a:p>
-            <a:pPr algn="ctr"/>
-          </a:p>
-        </p:txBody>
-      </p:sp>
-      <p:sp>
-        <p:nvSpPr>
-          <p:cNvPr id="17" name="TextBox 16"/>
-          <p:cNvSpPr txBox="1"/>
-          <p:nvPr/>
-        </p:nvSpPr>
-        <p:spPr>
-          <a:xfrm>
-            <a:off x="8248079" y="1080000"/>
-            <a:ext cx="3512039" cy="216000"/>
-          </a:xfrm>
-          <a:prstGeom prst="rect">
-            <a:avLst/>
-          </a:prstGeom>
-          <a:noFill/>
-        </p:spPr>
-        <p:txBody>
-          <a:bodyPr wrap="square">
-            <a:spAutoFit/>
-          </a:bodyPr>
-          <a:lstStyle/>
-          <a:p>
-            <a:pPr algn="l"/>
-            <a:r>
-              <a:rPr sz="1600" b="1">
-                <a:solidFill>
-                  <a:srgbClr val="FFFFFF"/>
-                </a:solidFill>
-                <a:latin typeface="Calibri"/>
-              </a:rPr>
-              <a:t>Инфраструктура</a:t>
-            </a:r>
-          </a:p>
-        </p:txBody>
-      </p:sp>
-      <p:sp>
-        <p:nvSpPr>
-          <p:cNvPr id="18" name="TextBox 17"/>
-          <p:cNvSpPr txBox="1"/>
-          <p:nvPr/>
-        </p:nvSpPr>
-        <p:spPr>
-          <a:xfrm>
-            <a:off x="8284079" y="1440000"/>
-            <a:ext cx="3440039" cy="4372201"/>
-          </a:xfrm>
-          <a:prstGeom prst="rect">
-            <a:avLst/>
-          </a:prstGeom>
-          <a:noFill/>
-        </p:spPr>
-        <p:txBody>
-          <a:bodyPr wrap="square">
-            <a:spAutoFit/>
-          </a:bodyPr>
-          <a:lstStyle/>
-          <a:p>
-            <a:pPr>
-              <a:spcAft>
-                <a:spcPts val="400"/>
-              </a:spcAft>
-            </a:pPr>
-            <a:r>
-              <a:rPr sz="1600">
-                <a:solidFill>
-                  <a:srgbClr val="1A1F2B"/>
-                </a:solidFill>
-                <a:latin typeface="Calibri"/>
-              </a:rPr>
-              <a:t>•  PostgreSQL 16</a:t>
-            </a:r>
-          </a:p>
-          <a:p>
-            <a:pPr>
-              <a:spcAft>
-                <a:spcPts val="400"/>
-              </a:spcAft>
-            </a:pPr>
-            <a:r>
-              <a:rPr sz="1600">
-                <a:solidFill>
-                  <a:srgbClr val="1A1F2B"/>
-                </a:solidFill>
-                <a:latin typeface="Calibri"/>
-              </a:rPr>
-              <a:t>•  Redis 7</a:t>
-            </a:r>
-          </a:p>
-          <a:p>
-            <a:pPr>
-              <a:spcAft>
-                <a:spcPts val="400"/>
-              </a:spcAft>
-            </a:pPr>
-            <a:r>
-              <a:rPr sz="1600">
-                <a:solidFill>
-                  <a:srgbClr val="1A1F2B"/>
-                </a:solidFill>
-                <a:latin typeface="Calibri"/>
-              </a:rPr>
-              <a:t>•  MinIO</a:t>
-            </a:r>
-          </a:p>
-          <a:p>
-            <a:pPr>
-              <a:spcAft>
-                <a:spcPts val="400"/>
-              </a:spcAft>
-            </a:pPr>
-            <a:r>
-              <a:rPr sz="1600">
-                <a:solidFill>
-                  <a:srgbClr val="1A1F2B"/>
-                </a:solidFill>
-                <a:latin typeface="Calibri"/>
-              </a:rPr>
-              <a:t>•  Docker Compose</a:t>
-            </a:r>
-          </a:p>
-          <a:p>
-            <a:pPr>
-              <a:spcAft>
-                <a:spcPts val="400"/>
-              </a:spcAft>
-            </a:pPr>
-            <a:r>
-              <a:rPr sz="1600">
-                <a:solidFill>
-                  <a:srgbClr val="1A1F2B"/>
-                </a:solidFill>
-                <a:latin typeface="Calibri"/>
-              </a:rPr>
-              <a:t>•  Traefik</a:t>
-            </a:r>
-          </a:p>
-          <a:p>
-            <a:pPr>
-              <a:spcAft>
-                <a:spcPts val="400"/>
-              </a:spcAft>
-            </a:pPr>
-            <a:r>
-              <a:rPr sz="1600">
-                <a:solidFill>
-                  <a:srgbClr val="1A1F2B"/>
-                </a:solidFill>
-                <a:latin typeface="Calibri"/>
-              </a:rPr>
-              <a:t>•  Prometheus</a:t>
-            </a:r>
-          </a:p>
-        </p:txBody>
-      </p:sp>
-      <p:sp>
-        <p:nvSpPr>
-          <p:cNvPr id="19" name="TextBox 18"/>
+              <a:t>•  Fractional indexing (column_position) для drag-and-drop без массовых апдейтов.</a:t>
+            </a:r>
+          </a:p>
+        </p:txBody>
+      </p:sp>
+      <p:sp>
+        <p:nvSpPr>
+          <p:cNvPr id="9" name="TextBox 8"/>
           <p:cNvSpPr txBox="1"/>
           <p:nvPr/>
         </p:nvSpPr>
@@ -5665,7 +5174,7 @@
       </p:sp>
       <p:sp>
         <p:nvSpPr>
-          <p:cNvPr id="20" name="TextBox 19"/>
+          <p:cNvPr id="10" name="TextBox 9"/>
           <p:cNvSpPr txBox="1"/>
           <p:nvPr/>
         </p:nvSpPr>
@@ -5833,7 +5342,7 @@
                 </a:solidFill>
                 <a:latin typeface="Calibri"/>
               </a:rPr>
-              <a:t>Результаты работы</a:t>
+              <a:t>2.4. Поведение системы</a:t>
             </a:r>
           </a:p>
         </p:txBody>
@@ -5883,59 +5392,14 @@
       </p:sp>
       <p:sp>
         <p:nvSpPr>
-          <p:cNvPr id="6" name="Rounded Rectangle 5"/>
-          <p:cNvSpPr/>
-          <p:nvPr/>
-        </p:nvSpPr>
-        <p:spPr>
-          <a:xfrm>
-            <a:off x="324000" y="1044000"/>
-            <a:ext cx="2706029" cy="1620000"/>
-          </a:xfrm>
-          <a:prstGeom prst="roundRect">
-            <a:avLst>
-              <a:gd name="adj" fmla="val 7000"/>
-            </a:avLst>
-          </a:prstGeom>
-          <a:solidFill>
-            <a:srgbClr val="0F2D52"/>
-          </a:solidFill>
-          <a:ln>
-            <a:noFill/>
-          </a:ln>
-        </p:spPr>
-        <p:style>
-          <a:lnRef idx="1">
-            <a:schemeClr val="accent1"/>
-          </a:lnRef>
-          <a:fillRef idx="3">
-            <a:schemeClr val="accent1"/>
-          </a:fillRef>
-          <a:effectRef idx="2">
-            <a:schemeClr val="accent1"/>
-          </a:effectRef>
-          <a:fontRef idx="minor">
-            <a:schemeClr val="lt1"/>
-          </a:fontRef>
-        </p:style>
-        <p:txBody>
-          <a:bodyPr rtlCol="0" anchor="ctr"/>
-          <a:lstStyle/>
-          <a:p>
-            <a:pPr algn="ctr"/>
-          </a:p>
-        </p:txBody>
-      </p:sp>
-      <p:sp>
-        <p:nvSpPr>
-          <p:cNvPr id="7" name="TextBox 6"/>
+          <p:cNvPr id="6" name="TextBox 5"/>
           <p:cNvSpPr txBox="1"/>
           <p:nvPr/>
         </p:nvSpPr>
         <p:spPr>
           <a:xfrm>
-            <a:off x="324000" y="1224000"/>
-            <a:ext cx="2706029" cy="900000"/>
+            <a:off x="288000" y="666000"/>
+            <a:ext cx="11616119" cy="324000"/>
           </a:xfrm>
           <a:prstGeom prst="rect">
             <a:avLst/>
@@ -5948,29 +5412,77 @@
           </a:bodyPr>
           <a:lstStyle/>
           <a:p>
-            <a:pPr algn="ctr"/>
-            <a:r>
-              <a:rPr sz="5400" b="1">
-                <a:solidFill>
-                  <a:srgbClr val="FFFFFF"/>
-                </a:solidFill>
-                <a:latin typeface="Calibri"/>
-              </a:rPr>
-              <a:t>11</a:t>
-            </a:r>
-          </a:p>
-        </p:txBody>
-      </p:sp>
-      <p:sp>
-        <p:nvSpPr>
-          <p:cNvPr id="8" name="TextBox 7"/>
+            <a:pPr algn="l"/>
+            <a:r>
+              <a:rPr sz="1400" b="0">
+                <a:solidFill>
+                  <a:srgbClr val="555C66"/>
+                </a:solidFill>
+                <a:latin typeface="Calibri"/>
+              </a:rPr>
+              <a:t>Sequence — создание задачи · State — жизненный цикл</a:t>
+            </a:r>
+          </a:p>
+        </p:txBody>
+      </p:sp>
+      <p:pic>
+        <p:nvPicPr>
+          <p:cNvPr id="7" name="Picture 6" descr="sequence-create-issue.png"/>
+          <p:cNvPicPr>
+            <a:picLocks noChangeAspect="1"/>
+          </p:cNvPicPr>
+          <p:nvPr/>
+        </p:nvPicPr>
+        <p:blipFill>
+          <a:blip r:embed="rId2"/>
+          <a:stretch>
+            <a:fillRect/>
+          </a:stretch>
+        </p:blipFill>
+        <p:spPr>
+          <a:xfrm>
+            <a:off x="324000" y="1044000"/>
+            <a:ext cx="5682059" cy="4605300"/>
+          </a:xfrm>
+          <a:prstGeom prst="rect">
+            <a:avLst/>
+          </a:prstGeom>
+        </p:spPr>
+      </p:pic>
+      <p:pic>
+        <p:nvPicPr>
+          <p:cNvPr id="8" name="Picture 7" descr="state-issue.png"/>
+          <p:cNvPicPr>
+            <a:picLocks noChangeAspect="1"/>
+          </p:cNvPicPr>
+          <p:nvPr/>
+        </p:nvPicPr>
+        <p:blipFill>
+          <a:blip r:embed="rId3"/>
+          <a:stretch>
+            <a:fillRect/>
+          </a:stretch>
+        </p:blipFill>
+        <p:spPr>
+          <a:xfrm>
+            <a:off x="6186059" y="1044000"/>
+            <a:ext cx="5682059" cy="4605300"/>
+          </a:xfrm>
+          <a:prstGeom prst="rect">
+            <a:avLst/>
+          </a:prstGeom>
+        </p:spPr>
+      </p:pic>
+      <p:sp>
+        <p:nvSpPr>
+          <p:cNvPr id="9" name="TextBox 8"/>
           <p:cNvSpPr txBox="1"/>
           <p:nvPr/>
         </p:nvSpPr>
         <p:spPr>
           <a:xfrm>
-            <a:off x="432000" y="2124000"/>
-            <a:ext cx="2490029" cy="503999"/>
+            <a:off x="324000" y="5703480"/>
+            <a:ext cx="5682059" cy="360000"/>
           </a:xfrm>
           <a:prstGeom prst="rect">
             <a:avLst/>
@@ -5985,59 +5497,14 @@
           <a:p>
             <a:pPr algn="ctr"/>
             <a:r>
-              <a:rPr sz="1300" b="0">
-                <a:solidFill>
-                  <a:srgbClr val="FFFFFF"/>
-                </a:solidFill>
-                <a:latin typeface="Calibri"/>
-              </a:rPr>
-              <a:t>UML-диаграмм в полном комплекте</a:t>
-            </a:r>
-          </a:p>
-        </p:txBody>
-      </p:sp>
-      <p:sp>
-        <p:nvSpPr>
-          <p:cNvPr id="9" name="Rounded Rectangle 8"/>
-          <p:cNvSpPr/>
-          <p:nvPr/>
-        </p:nvSpPr>
-        <p:spPr>
-          <a:xfrm>
-            <a:off x="3210029" y="1044000"/>
-            <a:ext cx="2706029" cy="1620000"/>
-          </a:xfrm>
-          <a:prstGeom prst="roundRect">
-            <a:avLst>
-              <a:gd name="adj" fmla="val 7000"/>
-            </a:avLst>
-          </a:prstGeom>
-          <a:solidFill>
-            <a:srgbClr val="0F2D52"/>
-          </a:solidFill>
-          <a:ln>
-            <a:noFill/>
-          </a:ln>
-        </p:spPr>
-        <p:style>
-          <a:lnRef idx="1">
-            <a:schemeClr val="accent1"/>
-          </a:lnRef>
-          <a:fillRef idx="3">
-            <a:schemeClr val="accent1"/>
-          </a:fillRef>
-          <a:effectRef idx="2">
-            <a:schemeClr val="accent1"/>
-          </a:effectRef>
-          <a:fontRef idx="minor">
-            <a:schemeClr val="lt1"/>
-          </a:fontRef>
-        </p:style>
-        <p:txBody>
-          <a:bodyPr rtlCol="0" anchor="ctr"/>
-          <a:lstStyle/>
-          <a:p>
-            <a:pPr algn="ctr"/>
+              <a:rPr sz="1200" b="0">
+                <a:solidFill>
+                  <a:srgbClr val="555C66"/>
+                </a:solidFill>
+                <a:latin typeface="Calibri"/>
+              </a:rPr>
+              <a:t>Sequence: HTTP-путь + асинхронные события (EventEmitter, WebSocket).</a:t>
+            </a:r>
           </a:p>
         </p:txBody>
       </p:sp>
@@ -6049,8 +5516,8 @@
         </p:nvSpPr>
         <p:spPr>
           <a:xfrm>
-            <a:off x="3210029" y="1224000"/>
-            <a:ext cx="2706029" cy="900000"/>
+            <a:off x="6186059" y="5703480"/>
+            <a:ext cx="5682059" cy="360000"/>
           </a:xfrm>
           <a:prstGeom prst="rect">
             <a:avLst/>
@@ -6065,13 +5532,13 @@
           <a:p>
             <a:pPr algn="ctr"/>
             <a:r>
-              <a:rPr sz="5400" b="1">
-                <a:solidFill>
-                  <a:srgbClr val="FFFFFF"/>
-                </a:solidFill>
-                <a:latin typeface="Calibri"/>
-              </a:rPr>
-              <a:t>9</a:t>
+              <a:rPr sz="1200" b="0">
+                <a:solidFill>
+                  <a:srgbClr val="555C66"/>
+                </a:solidFill>
+                <a:latin typeface="Calibri"/>
+              </a:rPr>
+              <a:t>State: 6 состояний IssueStatus, переходы фиксируются в issue_changelog.</a:t>
             </a:r>
           </a:p>
         </p:txBody>
@@ -6079,358 +5546,6 @@
       <p:sp>
         <p:nvSpPr>
           <p:cNvPr id="11" name="TextBox 10"/>
-          <p:cNvSpPr txBox="1"/>
-          <p:nvPr/>
-        </p:nvSpPr>
-        <p:spPr>
-          <a:xfrm>
-            <a:off x="3318029" y="2124000"/>
-            <a:ext cx="2490029" cy="503999"/>
-          </a:xfrm>
-          <a:prstGeom prst="rect">
-            <a:avLst/>
-          </a:prstGeom>
-          <a:noFill/>
-        </p:spPr>
-        <p:txBody>
-          <a:bodyPr wrap="square">
-            <a:spAutoFit/>
-          </a:bodyPr>
-          <a:lstStyle/>
-          <a:p>
-            <a:pPr algn="ctr"/>
-            <a:r>
-              <a:rPr sz="1300" b="0">
-                <a:solidFill>
-                  <a:srgbClr val="FFFFFF"/>
-                </a:solidFill>
-                <a:latin typeface="Calibri"/>
-              </a:rPr>
-              <a:t>NestJS-модулей backend</a:t>
-            </a:r>
-          </a:p>
-        </p:txBody>
-      </p:sp>
-      <p:sp>
-        <p:nvSpPr>
-          <p:cNvPr id="12" name="Rounded Rectangle 11"/>
-          <p:cNvSpPr/>
-          <p:nvPr/>
-        </p:nvSpPr>
-        <p:spPr>
-          <a:xfrm>
-            <a:off x="6096059" y="1044000"/>
-            <a:ext cx="2706029" cy="1620000"/>
-          </a:xfrm>
-          <a:prstGeom prst="roundRect">
-            <a:avLst>
-              <a:gd name="adj" fmla="val 7000"/>
-            </a:avLst>
-          </a:prstGeom>
-          <a:solidFill>
-            <a:srgbClr val="0F2D52"/>
-          </a:solidFill>
-          <a:ln>
-            <a:noFill/>
-          </a:ln>
-        </p:spPr>
-        <p:style>
-          <a:lnRef idx="1">
-            <a:schemeClr val="accent1"/>
-          </a:lnRef>
-          <a:fillRef idx="3">
-            <a:schemeClr val="accent1"/>
-          </a:fillRef>
-          <a:effectRef idx="2">
-            <a:schemeClr val="accent1"/>
-          </a:effectRef>
-          <a:fontRef idx="minor">
-            <a:schemeClr val="lt1"/>
-          </a:fontRef>
-        </p:style>
-        <p:txBody>
-          <a:bodyPr rtlCol="0" anchor="ctr"/>
-          <a:lstStyle/>
-          <a:p>
-            <a:pPr algn="ctr"/>
-          </a:p>
-        </p:txBody>
-      </p:sp>
-      <p:sp>
-        <p:nvSpPr>
-          <p:cNvPr id="13" name="TextBox 12"/>
-          <p:cNvSpPr txBox="1"/>
-          <p:nvPr/>
-        </p:nvSpPr>
-        <p:spPr>
-          <a:xfrm>
-            <a:off x="6096059" y="1224000"/>
-            <a:ext cx="2706029" cy="900000"/>
-          </a:xfrm>
-          <a:prstGeom prst="rect">
-            <a:avLst/>
-          </a:prstGeom>
-          <a:noFill/>
-        </p:spPr>
-        <p:txBody>
-          <a:bodyPr wrap="square">
-            <a:spAutoFit/>
-          </a:bodyPr>
-          <a:lstStyle/>
-          <a:p>
-            <a:pPr algn="ctr"/>
-            <a:r>
-              <a:rPr sz="5400" b="1">
-                <a:solidFill>
-                  <a:srgbClr val="FFFFFF"/>
-                </a:solidFill>
-                <a:latin typeface="Calibri"/>
-              </a:rPr>
-              <a:t>12</a:t>
-            </a:r>
-          </a:p>
-        </p:txBody>
-      </p:sp>
-      <p:sp>
-        <p:nvSpPr>
-          <p:cNvPr id="14" name="TextBox 13"/>
-          <p:cNvSpPr txBox="1"/>
-          <p:nvPr/>
-        </p:nvSpPr>
-        <p:spPr>
-          <a:xfrm>
-            <a:off x="6204059" y="2124000"/>
-            <a:ext cx="2490029" cy="503999"/>
-          </a:xfrm>
-          <a:prstGeom prst="rect">
-            <a:avLst/>
-          </a:prstGeom>
-          <a:noFill/>
-        </p:spPr>
-        <p:txBody>
-          <a:bodyPr wrap="square">
-            <a:spAutoFit/>
-          </a:bodyPr>
-          <a:lstStyle/>
-          <a:p>
-            <a:pPr algn="ctr"/>
-            <a:r>
-              <a:rPr sz="1300" b="0">
-                <a:solidFill>
-                  <a:srgbClr val="FFFFFF"/>
-                </a:solidFill>
-                <a:latin typeface="Calibri"/>
-              </a:rPr>
-              <a:t>таблиц БД с RLS-изоляцией</a:t>
-            </a:r>
-          </a:p>
-        </p:txBody>
-      </p:sp>
-      <p:sp>
-        <p:nvSpPr>
-          <p:cNvPr id="15" name="Rounded Rectangle 14"/>
-          <p:cNvSpPr/>
-          <p:nvPr/>
-        </p:nvSpPr>
-        <p:spPr>
-          <a:xfrm>
-            <a:off x="8982089" y="1044000"/>
-            <a:ext cx="2706029" cy="1620000"/>
-          </a:xfrm>
-          <a:prstGeom prst="roundRect">
-            <a:avLst>
-              <a:gd name="adj" fmla="val 7000"/>
-            </a:avLst>
-          </a:prstGeom>
-          <a:solidFill>
-            <a:srgbClr val="0F2D52"/>
-          </a:solidFill>
-          <a:ln>
-            <a:noFill/>
-          </a:ln>
-        </p:spPr>
-        <p:style>
-          <a:lnRef idx="1">
-            <a:schemeClr val="accent1"/>
-          </a:lnRef>
-          <a:fillRef idx="3">
-            <a:schemeClr val="accent1"/>
-          </a:fillRef>
-          <a:effectRef idx="2">
-            <a:schemeClr val="accent1"/>
-          </a:effectRef>
-          <a:fontRef idx="minor">
-            <a:schemeClr val="lt1"/>
-          </a:fontRef>
-        </p:style>
-        <p:txBody>
-          <a:bodyPr rtlCol="0" anchor="ctr"/>
-          <a:lstStyle/>
-          <a:p>
-            <a:pPr algn="ctr"/>
-          </a:p>
-        </p:txBody>
-      </p:sp>
-      <p:sp>
-        <p:nvSpPr>
-          <p:cNvPr id="16" name="TextBox 15"/>
-          <p:cNvSpPr txBox="1"/>
-          <p:nvPr/>
-        </p:nvSpPr>
-        <p:spPr>
-          <a:xfrm>
-            <a:off x="8982089" y="1224000"/>
-            <a:ext cx="2706029" cy="900000"/>
-          </a:xfrm>
-          <a:prstGeom prst="rect">
-            <a:avLst/>
-          </a:prstGeom>
-          <a:noFill/>
-        </p:spPr>
-        <p:txBody>
-          <a:bodyPr wrap="square">
-            <a:spAutoFit/>
-          </a:bodyPr>
-          <a:lstStyle/>
-          <a:p>
-            <a:pPr algn="ctr"/>
-            <a:r>
-              <a:rPr sz="5400" b="1">
-                <a:solidFill>
-                  <a:srgbClr val="FFFFFF"/>
-                </a:solidFill>
-                <a:latin typeface="Calibri"/>
-              </a:rPr>
-              <a:t>4</a:t>
-            </a:r>
-          </a:p>
-        </p:txBody>
-      </p:sp>
-      <p:sp>
-        <p:nvSpPr>
-          <p:cNvPr id="17" name="TextBox 16"/>
-          <p:cNvSpPr txBox="1"/>
-          <p:nvPr/>
-        </p:nvSpPr>
-        <p:spPr>
-          <a:xfrm>
-            <a:off x="9090089" y="2124000"/>
-            <a:ext cx="2490029" cy="503999"/>
-          </a:xfrm>
-          <a:prstGeom prst="rect">
-            <a:avLst/>
-          </a:prstGeom>
-          <a:noFill/>
-        </p:spPr>
-        <p:txBody>
-          <a:bodyPr wrap="square">
-            <a:spAutoFit/>
-          </a:bodyPr>
-          <a:lstStyle/>
-          <a:p>
-            <a:pPr algn="ctr"/>
-            <a:r>
-              <a:rPr sz="1300" b="0">
-                <a:solidFill>
-                  <a:srgbClr val="FFFFFF"/>
-                </a:solidFill>
-                <a:latin typeface="Calibri"/>
-              </a:rPr>
-              <a:t>роли пользователей в системе</a:t>
-            </a:r>
-          </a:p>
-        </p:txBody>
-      </p:sp>
-      <p:sp>
-        <p:nvSpPr>
-          <p:cNvPr id="18" name="TextBox 17"/>
-          <p:cNvSpPr txBox="1"/>
-          <p:nvPr/>
-        </p:nvSpPr>
-        <p:spPr>
-          <a:xfrm>
-            <a:off x="324000" y="2916000"/>
-            <a:ext cx="11544119" cy="3474000"/>
-          </a:xfrm>
-          <a:prstGeom prst="rect">
-            <a:avLst/>
-          </a:prstGeom>
-          <a:noFill/>
-        </p:spPr>
-        <p:txBody>
-          <a:bodyPr wrap="square">
-            <a:spAutoFit/>
-          </a:bodyPr>
-          <a:lstStyle/>
-          <a:p>
-            <a:pPr algn="l">
-              <a:spcAft>
-                <a:spcPts val="600"/>
-              </a:spcAft>
-            </a:pPr>
-            <a:r>
-              <a:rPr sz="1500">
-                <a:solidFill>
-                  <a:srgbClr val="1A1F2B"/>
-                </a:solidFill>
-                <a:latin typeface="Calibri"/>
-              </a:rPr>
-              <a:t>•  Реализован прототип системы: аутентификация, проекты, доски, задачи, комментарии, вложения, поиск.</a:t>
-            </a:r>
-          </a:p>
-          <a:p>
-            <a:pPr algn="l">
-              <a:spcAft>
-                <a:spcPts val="600"/>
-              </a:spcAft>
-            </a:pPr>
-            <a:r>
-              <a:rPr sz="1500">
-                <a:solidFill>
-                  <a:srgbClr val="1A1F2B"/>
-                </a:solidFill>
-                <a:latin typeface="Calibri"/>
-              </a:rPr>
-              <a:t>•  Подготовлена пояснительная записка (≈30 страниц) по требованиям ГОСТ 7.32.</a:t>
-            </a:r>
-          </a:p>
-          <a:p>
-            <a:pPr algn="l">
-              <a:spcAft>
-                <a:spcPts val="600"/>
-              </a:spcAft>
-            </a:pPr>
-            <a:r>
-              <a:rPr sz="1500">
-                <a:solidFill>
-                  <a:srgbClr val="1A1F2B"/>
-                </a:solidFill>
-                <a:latin typeface="Calibri"/>
-              </a:rPr>
-              <a:t>•  Архитектура верифицирована UML-моделями уровня use case, classes, ER, dynamic behavior, deployment.</a:t>
-            </a:r>
-          </a:p>
-          <a:p>
-            <a:pPr algn="l">
-              <a:spcAft>
-                <a:spcPts val="600"/>
-              </a:spcAft>
-            </a:pPr>
-            <a:r>
-              <a:rPr sz="1500">
-                <a:solidFill>
-                  <a:srgbClr val="1A1F2B"/>
-                </a:solidFill>
-                <a:latin typeface="Calibri"/>
-              </a:rPr>
-              <a:t>•  Стек контейнеризован: проект разворачивается единой командой docker compose up.</a:t>
-            </a:r>
-          </a:p>
-        </p:txBody>
-      </p:sp>
-      <p:sp>
-        <p:nvSpPr>
-          <p:cNvPr id="19" name="TextBox 18"/>
           <p:cNvSpPr txBox="1"/>
           <p:nvPr/>
         </p:nvSpPr>
@@ -6465,7 +5580,7 @@
       </p:sp>
       <p:sp>
         <p:nvSpPr>
-          <p:cNvPr id="20" name="TextBox 19"/>
+          <p:cNvPr id="12" name="TextBox 11"/>
           <p:cNvSpPr txBox="1"/>
           <p:nvPr/>
         </p:nvSpPr>
@@ -7966,7 +7081,7 @@
             <a:avLst/>
           </a:prstGeom>
           <a:solidFill>
-            <a:srgbClr val="FFFFFF"/>
+            <a:srgbClr val="0F2D52"/>
           </a:solidFill>
           <a:ln>
             <a:noFill/>
@@ -8003,86 +7118,8 @@
         </p:nvSpPr>
         <p:spPr>
           <a:xfrm>
-            <a:off x="0" y="0"/>
-            <a:ext cx="12192119" cy="576000"/>
-          </a:xfrm>
-          <a:prstGeom prst="rect">
-            <a:avLst/>
-          </a:prstGeom>
-          <a:solidFill>
-            <a:srgbClr val="0F2D52"/>
-          </a:solidFill>
-          <a:ln>
-            <a:noFill/>
-          </a:ln>
-        </p:spPr>
-        <p:style>
-          <a:lnRef idx="1">
-            <a:schemeClr val="accent1"/>
-          </a:lnRef>
-          <a:fillRef idx="3">
-            <a:schemeClr val="accent1"/>
-          </a:fillRef>
-          <a:effectRef idx="2">
-            <a:schemeClr val="accent1"/>
-          </a:effectRef>
-          <a:fontRef idx="minor">
-            <a:schemeClr val="lt1"/>
-          </a:fontRef>
-        </p:style>
-        <p:txBody>
-          <a:bodyPr rtlCol="0" anchor="ctr"/>
-          <a:lstStyle/>
-          <a:p>
-            <a:pPr algn="ctr"/>
-          </a:p>
-        </p:txBody>
-      </p:sp>
-      <p:sp>
-        <p:nvSpPr>
-          <p:cNvPr id="4" name="TextBox 3"/>
-          <p:cNvSpPr txBox="1"/>
-          <p:nvPr/>
-        </p:nvSpPr>
-        <p:spPr>
-          <a:xfrm>
-            <a:off x="288000" y="54000"/>
-            <a:ext cx="11616119" cy="503999"/>
-          </a:xfrm>
-          <a:prstGeom prst="rect">
-            <a:avLst/>
-          </a:prstGeom>
-          <a:noFill/>
-        </p:spPr>
-        <p:txBody>
-          <a:bodyPr wrap="square" tIns="0" bIns="0">
-            <a:spAutoFit/>
-          </a:bodyPr>
-          <a:lstStyle/>
-          <a:p>
-            <a:pPr algn="l"/>
-            <a:r>
-              <a:rPr sz="2200" b="1">
-                <a:solidFill>
-                  <a:srgbClr val="FFFFFF"/>
-                </a:solidFill>
-                <a:latin typeface="Calibri"/>
-              </a:rPr>
-              <a:t>Объект, предмет и методы</a:t>
-            </a:r>
-          </a:p>
-        </p:txBody>
-      </p:sp>
-      <p:sp>
-        <p:nvSpPr>
-          <p:cNvPr id="5" name="Rectangle 4"/>
-          <p:cNvSpPr/>
-          <p:nvPr/>
-        </p:nvSpPr>
-        <p:spPr>
-          <a:xfrm>
-            <a:off x="0" y="576000"/>
-            <a:ext cx="12192119" cy="28800"/>
+            <a:off x="720000" y="2736000"/>
+            <a:ext cx="1260000" cy="64800"/>
           </a:xfrm>
           <a:prstGeom prst="rect">
             <a:avLst/>
@@ -8118,102 +7155,14 @@
       </p:sp>
       <p:sp>
         <p:nvSpPr>
-          <p:cNvPr id="6" name="Rounded Rectangle 5"/>
-          <p:cNvSpPr/>
-          <p:nvPr/>
-        </p:nvSpPr>
-        <p:spPr>
-          <a:xfrm>
-            <a:off x="324000" y="1044000"/>
-            <a:ext cx="3728039" cy="4876200"/>
-          </a:xfrm>
-          <a:prstGeom prst="roundRect">
-            <a:avLst>
-              <a:gd name="adj" fmla="val 5000"/>
-            </a:avLst>
-          </a:prstGeom>
-          <a:solidFill>
-            <a:srgbClr val="F2F5F9"/>
-          </a:solidFill>
-          <a:ln>
-            <a:noFill/>
-          </a:ln>
-        </p:spPr>
-        <p:style>
-          <a:lnRef idx="1">
-            <a:schemeClr val="accent1"/>
-          </a:lnRef>
-          <a:fillRef idx="3">
-            <a:schemeClr val="accent1"/>
-          </a:fillRef>
-          <a:effectRef idx="2">
-            <a:schemeClr val="accent1"/>
-          </a:effectRef>
-          <a:fontRef idx="minor">
-            <a:schemeClr val="lt1"/>
-          </a:fontRef>
-        </p:style>
-        <p:txBody>
-          <a:bodyPr rtlCol="0" anchor="ctr"/>
-          <a:lstStyle/>
-          <a:p>
-            <a:pPr algn="ctr"/>
-          </a:p>
-        </p:txBody>
-      </p:sp>
-      <p:sp>
-        <p:nvSpPr>
-          <p:cNvPr id="7" name="Rectangle 6"/>
-          <p:cNvSpPr/>
-          <p:nvPr/>
-        </p:nvSpPr>
-        <p:spPr>
-          <a:xfrm>
-            <a:off x="324000" y="1044000"/>
-            <a:ext cx="3728039" cy="108000"/>
-          </a:xfrm>
-          <a:prstGeom prst="rect">
-            <a:avLst/>
-          </a:prstGeom>
-          <a:solidFill>
-            <a:srgbClr val="1F77B4"/>
-          </a:solidFill>
-          <a:ln>
-            <a:noFill/>
-          </a:ln>
-        </p:spPr>
-        <p:style>
-          <a:lnRef idx="1">
-            <a:schemeClr val="accent1"/>
-          </a:lnRef>
-          <a:fillRef idx="3">
-            <a:schemeClr val="accent1"/>
-          </a:fillRef>
-          <a:effectRef idx="2">
-            <a:schemeClr val="accent1"/>
-          </a:effectRef>
-          <a:fontRef idx="minor">
-            <a:schemeClr val="lt1"/>
-          </a:fontRef>
-        </p:style>
-        <p:txBody>
-          <a:bodyPr rtlCol="0" anchor="ctr"/>
-          <a:lstStyle/>
-          <a:p>
-            <a:pPr algn="ctr"/>
-          </a:p>
-        </p:txBody>
-      </p:sp>
-      <p:sp>
-        <p:nvSpPr>
-          <p:cNvPr id="8" name="TextBox 7"/>
+          <p:cNvPr id="4" name="TextBox 3"/>
           <p:cNvSpPr txBox="1"/>
           <p:nvPr/>
         </p:nvSpPr>
         <p:spPr>
           <a:xfrm>
-            <a:off x="468000" y="1260000"/>
-            <a:ext cx="3440039" cy="4588200"/>
+            <a:off x="720000" y="2160000"/>
+            <a:ext cx="10752119" cy="503999"/>
           </a:xfrm>
           <a:prstGeom prst="rect">
             <a:avLst/>
@@ -8226,132 +7175,29 @@
           </a:bodyPr>
           <a:lstStyle/>
           <a:p>
+            <a:pPr algn="l"/>
             <a:r>
               <a:rPr sz="2200" b="1">
                 <a:solidFill>
-                  <a:srgbClr val="0F2D52"/>
-                </a:solidFill>
-                <a:latin typeface="Calibri"/>
-              </a:rPr>
-              <a:t>Объект</a:t>
-            </a:r>
-          </a:p>
-          <a:p>
-            <a:pPr>
-              <a:spcBef>
-                <a:spcPts val="1200"/>
-              </a:spcBef>
-            </a:pPr>
-            <a:r>
-              <a:rPr sz="1600">
-                <a:solidFill>
-                  <a:srgbClr val="1A1F2B"/>
-                </a:solidFill>
-                <a:latin typeface="Calibri"/>
-              </a:rPr>
-              <a:t>Процессы планирования и контроля задач в распределённых проектных командах.</a:t>
-            </a:r>
-          </a:p>
-        </p:txBody>
-      </p:sp>
-      <p:sp>
-        <p:nvSpPr>
-          <p:cNvPr id="9" name="Rounded Rectangle 8"/>
-          <p:cNvSpPr/>
-          <p:nvPr/>
-        </p:nvSpPr>
-        <p:spPr>
-          <a:xfrm>
-            <a:off x="4232039" y="1044000"/>
-            <a:ext cx="3728039" cy="4876200"/>
-          </a:xfrm>
-          <a:prstGeom prst="roundRect">
-            <a:avLst>
-              <a:gd name="adj" fmla="val 5000"/>
-            </a:avLst>
-          </a:prstGeom>
-          <a:solidFill>
-            <a:srgbClr val="F2F5F9"/>
-          </a:solidFill>
-          <a:ln>
-            <a:noFill/>
-          </a:ln>
-        </p:spPr>
-        <p:style>
-          <a:lnRef idx="1">
-            <a:schemeClr val="accent1"/>
-          </a:lnRef>
-          <a:fillRef idx="3">
-            <a:schemeClr val="accent1"/>
-          </a:fillRef>
-          <a:effectRef idx="2">
-            <a:schemeClr val="accent1"/>
-          </a:effectRef>
-          <a:fontRef idx="minor">
-            <a:schemeClr val="lt1"/>
-          </a:fontRef>
-        </p:style>
-        <p:txBody>
-          <a:bodyPr rtlCol="0" anchor="ctr"/>
-          <a:lstStyle/>
-          <a:p>
-            <a:pPr algn="ctr"/>
-          </a:p>
-        </p:txBody>
-      </p:sp>
-      <p:sp>
-        <p:nvSpPr>
-          <p:cNvPr id="10" name="Rectangle 9"/>
-          <p:cNvSpPr/>
-          <p:nvPr/>
-        </p:nvSpPr>
-        <p:spPr>
-          <a:xfrm>
-            <a:off x="4232039" y="1044000"/>
-            <a:ext cx="3728039" cy="108000"/>
-          </a:xfrm>
-          <a:prstGeom prst="rect">
-            <a:avLst/>
-          </a:prstGeom>
-          <a:solidFill>
-            <a:srgbClr val="0F2D52"/>
-          </a:solidFill>
-          <a:ln>
-            <a:noFill/>
-          </a:ln>
-        </p:spPr>
-        <p:style>
-          <a:lnRef idx="1">
-            <a:schemeClr val="accent1"/>
-          </a:lnRef>
-          <a:fillRef idx="3">
-            <a:schemeClr val="accent1"/>
-          </a:fillRef>
-          <a:effectRef idx="2">
-            <a:schemeClr val="accent1"/>
-          </a:effectRef>
-          <a:fontRef idx="minor">
-            <a:schemeClr val="lt1"/>
-          </a:fontRef>
-        </p:style>
-        <p:txBody>
-          <a:bodyPr rtlCol="0" anchor="ctr"/>
-          <a:lstStyle/>
-          <a:p>
-            <a:pPr algn="ctr"/>
-          </a:p>
-        </p:txBody>
-      </p:sp>
-      <p:sp>
-        <p:nvSpPr>
-          <p:cNvPr id="11" name="TextBox 10"/>
+                  <a:srgbClr val="1F77B4"/>
+                </a:solidFill>
+                <a:latin typeface="Calibri"/>
+              </a:rPr>
+              <a:t>ГЛАВА 1</a:t>
+            </a:r>
+          </a:p>
+        </p:txBody>
+      </p:sp>
+      <p:sp>
+        <p:nvSpPr>
+          <p:cNvPr id="5" name="TextBox 4"/>
           <p:cNvSpPr txBox="1"/>
           <p:nvPr/>
         </p:nvSpPr>
         <p:spPr>
           <a:xfrm>
-            <a:off x="4376039" y="1260000"/>
-            <a:ext cx="3440039" cy="4588200"/>
+            <a:off x="720000" y="2951999"/>
+            <a:ext cx="10752119" cy="1080000"/>
           </a:xfrm>
           <a:prstGeom prst="rect">
             <a:avLst/>
@@ -8365,131 +7211,27 @@
           <a:lstStyle/>
           <a:p>
             <a:r>
-              <a:rPr sz="2200" b="1">
-                <a:solidFill>
-                  <a:srgbClr val="0F2D52"/>
-                </a:solidFill>
-                <a:latin typeface="Calibri"/>
-              </a:rPr>
-              <a:t>Предмет</a:t>
-            </a:r>
-          </a:p>
-          <a:p>
-            <a:pPr>
-              <a:spcBef>
-                <a:spcPts val="1200"/>
-              </a:spcBef>
-            </a:pPr>
-            <a:r>
-              <a:rPr sz="1600">
-                <a:solidFill>
-                  <a:srgbClr val="1A1F2B"/>
-                </a:solidFill>
-                <a:latin typeface="Calibri"/>
-              </a:rPr>
-              <a:t>Архитектура, модель данных и UML-документация прототипа task-management системы.</a:t>
-            </a:r>
-          </a:p>
-        </p:txBody>
-      </p:sp>
-      <p:sp>
-        <p:nvSpPr>
-          <p:cNvPr id="12" name="Rounded Rectangle 11"/>
-          <p:cNvSpPr/>
-          <p:nvPr/>
-        </p:nvSpPr>
-        <p:spPr>
-          <a:xfrm>
-            <a:off x="8140079" y="1044000"/>
-            <a:ext cx="3728039" cy="4876200"/>
-          </a:xfrm>
-          <a:prstGeom prst="roundRect">
-            <a:avLst>
-              <a:gd name="adj" fmla="val 5000"/>
-            </a:avLst>
-          </a:prstGeom>
-          <a:solidFill>
-            <a:srgbClr val="F2F5F9"/>
-          </a:solidFill>
-          <a:ln>
-            <a:noFill/>
-          </a:ln>
-        </p:spPr>
-        <p:style>
-          <a:lnRef idx="1">
-            <a:schemeClr val="accent1"/>
-          </a:lnRef>
-          <a:fillRef idx="3">
-            <a:schemeClr val="accent1"/>
-          </a:fillRef>
-          <a:effectRef idx="2">
-            <a:schemeClr val="accent1"/>
-          </a:effectRef>
-          <a:fontRef idx="minor">
-            <a:schemeClr val="lt1"/>
-          </a:fontRef>
-        </p:style>
-        <p:txBody>
-          <a:bodyPr rtlCol="0" anchor="ctr"/>
-          <a:lstStyle/>
-          <a:p>
-            <a:pPr algn="ctr"/>
-          </a:p>
-        </p:txBody>
-      </p:sp>
-      <p:sp>
-        <p:nvSpPr>
-          <p:cNvPr id="13" name="Rectangle 12"/>
-          <p:cNvSpPr/>
-          <p:nvPr/>
-        </p:nvSpPr>
-        <p:spPr>
-          <a:xfrm>
-            <a:off x="8140079" y="1044000"/>
-            <a:ext cx="3728039" cy="108000"/>
-          </a:xfrm>
-          <a:prstGeom prst="rect">
-            <a:avLst/>
-          </a:prstGeom>
-          <a:solidFill>
-            <a:srgbClr val="555C66"/>
-          </a:solidFill>
-          <a:ln>
-            <a:noFill/>
-          </a:ln>
-        </p:spPr>
-        <p:style>
-          <a:lnRef idx="1">
-            <a:schemeClr val="accent1"/>
-          </a:lnRef>
-          <a:fillRef idx="3">
-            <a:schemeClr val="accent1"/>
-          </a:fillRef>
-          <a:effectRef idx="2">
-            <a:schemeClr val="accent1"/>
-          </a:effectRef>
-          <a:fontRef idx="minor">
-            <a:schemeClr val="lt1"/>
-          </a:fontRef>
-        </p:style>
-        <p:txBody>
-          <a:bodyPr rtlCol="0" anchor="ctr"/>
-          <a:lstStyle/>
-          <a:p>
-            <a:pPr algn="ctr"/>
-          </a:p>
-        </p:txBody>
-      </p:sp>
-      <p:sp>
-        <p:nvSpPr>
-          <p:cNvPr id="14" name="TextBox 13"/>
+              <a:rPr sz="4400" b="1">
+                <a:solidFill>
+                  <a:srgbClr val="FFFFFF"/>
+                </a:solidFill>
+                <a:latin typeface="Calibri"/>
+              </a:rPr>
+              <a:t>Теоретическая часть</a:t>
+            </a:r>
+          </a:p>
+        </p:txBody>
+      </p:sp>
+      <p:sp>
+        <p:nvSpPr>
+          <p:cNvPr id="6" name="TextBox 5"/>
           <p:cNvSpPr txBox="1"/>
           <p:nvPr/>
         </p:nvSpPr>
         <p:spPr>
           <a:xfrm>
-            <a:off x="8284079" y="1260000"/>
-            <a:ext cx="3440039" cy="4588200"/>
+            <a:off x="720000" y="4320000"/>
+            <a:ext cx="10752119" cy="1080000"/>
           </a:xfrm>
           <a:prstGeom prst="rect">
             <a:avLst/>
@@ -8503,36 +7245,20 @@
           <a:lstStyle/>
           <a:p>
             <a:r>
-              <a:rPr sz="2200" b="1">
-                <a:solidFill>
-                  <a:srgbClr val="0F2D52"/>
-                </a:solidFill>
-                <a:latin typeface="Calibri"/>
-              </a:rPr>
-              <a:t>Методы</a:t>
-            </a:r>
-          </a:p>
-          <a:p>
-            <a:pPr>
-              <a:spcBef>
-                <a:spcPts val="1200"/>
-              </a:spcBef>
-            </a:pPr>
-            <a:r>
-              <a:rPr sz="1600">
-                <a:solidFill>
-                  <a:srgbClr val="1A1F2B"/>
-                </a:solidFill>
-                <a:latin typeface="Calibri"/>
-              </a:rPr>
-              <a:t>Системный анализ, объектно-ориентированное проектирование (UML 2.5), реляционное моделирование, программная инженерия.</a:t>
-            </a:r>
-          </a:p>
-        </p:txBody>
-      </p:sp>
-      <p:sp>
-        <p:nvSpPr>
-          <p:cNvPr id="15" name="TextBox 14"/>
+              <a:rPr sz="1800">
+                <a:solidFill>
+                  <a:srgbClr val="F2F5F9"/>
+                </a:solidFill>
+                <a:latin typeface="Calibri"/>
+              </a:rPr>
+              <a:t>Понятие систем управления задачами, анализ аналогов, обоснование выбора UML 2.5 и технологического стека прототипа.</a:t>
+            </a:r>
+          </a:p>
+        </p:txBody>
+      </p:sp>
+      <p:sp>
+        <p:nvSpPr>
+          <p:cNvPr id="7" name="TextBox 6"/>
           <p:cNvSpPr txBox="1"/>
           <p:nvPr/>
         </p:nvSpPr>
@@ -8552,11 +7278,10 @@
           </a:bodyPr>
           <a:lstStyle/>
           <a:p>
-            <a:pPr algn="l"/>
             <a:r>
               <a:rPr sz="1000">
                 <a:solidFill>
-                  <a:srgbClr val="555C66"/>
+                  <a:srgbClr val="F2F5F9"/>
                 </a:solidFill>
                 <a:latin typeface="Calibri"/>
               </a:rPr>
@@ -8567,7 +7292,7 @@
       </p:sp>
       <p:sp>
         <p:nvSpPr>
-          <p:cNvPr id="16" name="TextBox 15"/>
+          <p:cNvPr id="8" name="TextBox 7"/>
           <p:cNvSpPr txBox="1"/>
           <p:nvPr/>
         </p:nvSpPr>
@@ -8591,7 +7316,7 @@
             <a:r>
               <a:rPr sz="1000">
                 <a:solidFill>
-                  <a:srgbClr val="555C66"/>
+                  <a:srgbClr val="F2F5F9"/>
                 </a:solidFill>
                 <a:latin typeface="Calibri"/>
               </a:rPr>
@@ -8609,6 +7334,621 @@
 </file>
 
 <file path=ppt/slides/slide5.xml><?xml version="1.0" encoding="utf-8"?>
+<p:sld xmlns:a="http://schemas.openxmlformats.org/drawingml/2006/main" xmlns:p="http://schemas.openxmlformats.org/presentationml/2006/main" xmlns:r="http://schemas.openxmlformats.org/officeDocument/2006/relationships">
+  <p:cSld>
+    <p:spTree>
+      <p:nvGrpSpPr>
+        <p:cNvPr id="1" name=""/>
+        <p:cNvGrpSpPr/>
+        <p:nvPr/>
+      </p:nvGrpSpPr>
+      <p:grpSpPr/>
+      <p:sp>
+        <p:nvSpPr>
+          <p:cNvPr id="2" name="Rectangle 1"/>
+          <p:cNvSpPr/>
+          <p:nvPr/>
+        </p:nvSpPr>
+        <p:spPr>
+          <a:xfrm>
+            <a:off x="0" y="0"/>
+            <a:ext cx="12192119" cy="6858000"/>
+          </a:xfrm>
+          <a:prstGeom prst="rect">
+            <a:avLst/>
+          </a:prstGeom>
+          <a:solidFill>
+            <a:srgbClr val="FFFFFF"/>
+          </a:solidFill>
+          <a:ln>
+            <a:noFill/>
+          </a:ln>
+          <a:effectLst/>
+        </p:spPr>
+        <p:style>
+          <a:lnRef idx="1">
+            <a:schemeClr val="accent1"/>
+          </a:lnRef>
+          <a:fillRef idx="3">
+            <a:schemeClr val="accent1"/>
+          </a:fillRef>
+          <a:effectRef idx="2">
+            <a:schemeClr val="accent1"/>
+          </a:effectRef>
+          <a:fontRef idx="minor">
+            <a:schemeClr val="lt1"/>
+          </a:fontRef>
+        </p:style>
+        <p:txBody>
+          <a:bodyPr rtlCol="0" anchor="ctr"/>
+          <a:lstStyle/>
+          <a:p>
+            <a:pPr algn="ctr"/>
+          </a:p>
+        </p:txBody>
+      </p:sp>
+      <p:sp>
+        <p:nvSpPr>
+          <p:cNvPr id="3" name="Rectangle 2"/>
+          <p:cNvSpPr/>
+          <p:nvPr/>
+        </p:nvSpPr>
+        <p:spPr>
+          <a:xfrm>
+            <a:off x="0" y="0"/>
+            <a:ext cx="12192119" cy="576000"/>
+          </a:xfrm>
+          <a:prstGeom prst="rect">
+            <a:avLst/>
+          </a:prstGeom>
+          <a:solidFill>
+            <a:srgbClr val="0F2D52"/>
+          </a:solidFill>
+          <a:ln>
+            <a:noFill/>
+          </a:ln>
+        </p:spPr>
+        <p:style>
+          <a:lnRef idx="1">
+            <a:schemeClr val="accent1"/>
+          </a:lnRef>
+          <a:fillRef idx="3">
+            <a:schemeClr val="accent1"/>
+          </a:fillRef>
+          <a:effectRef idx="2">
+            <a:schemeClr val="accent1"/>
+          </a:effectRef>
+          <a:fontRef idx="minor">
+            <a:schemeClr val="lt1"/>
+          </a:fontRef>
+        </p:style>
+        <p:txBody>
+          <a:bodyPr rtlCol="0" anchor="ctr"/>
+          <a:lstStyle/>
+          <a:p>
+            <a:pPr algn="ctr"/>
+          </a:p>
+        </p:txBody>
+      </p:sp>
+      <p:sp>
+        <p:nvSpPr>
+          <p:cNvPr id="4" name="TextBox 3"/>
+          <p:cNvSpPr txBox="1"/>
+          <p:nvPr/>
+        </p:nvSpPr>
+        <p:spPr>
+          <a:xfrm>
+            <a:off x="288000" y="54000"/>
+            <a:ext cx="11616119" cy="503999"/>
+          </a:xfrm>
+          <a:prstGeom prst="rect">
+            <a:avLst/>
+          </a:prstGeom>
+          <a:noFill/>
+        </p:spPr>
+        <p:txBody>
+          <a:bodyPr wrap="square" tIns="0" bIns="0">
+            <a:spAutoFit/>
+          </a:bodyPr>
+          <a:lstStyle/>
+          <a:p>
+            <a:pPr algn="l"/>
+            <a:r>
+              <a:rPr sz="2200" b="1">
+                <a:solidFill>
+                  <a:srgbClr val="FFFFFF"/>
+                </a:solidFill>
+                <a:latin typeface="Calibri"/>
+              </a:rPr>
+              <a:t>1.1. Системы управления задачами</a:t>
+            </a:r>
+          </a:p>
+        </p:txBody>
+      </p:sp>
+      <p:sp>
+        <p:nvSpPr>
+          <p:cNvPr id="5" name="Rectangle 4"/>
+          <p:cNvSpPr/>
+          <p:nvPr/>
+        </p:nvSpPr>
+        <p:spPr>
+          <a:xfrm>
+            <a:off x="0" y="576000"/>
+            <a:ext cx="12192119" cy="28800"/>
+          </a:xfrm>
+          <a:prstGeom prst="rect">
+            <a:avLst/>
+          </a:prstGeom>
+          <a:solidFill>
+            <a:srgbClr val="1F77B4"/>
+          </a:solidFill>
+          <a:ln>
+            <a:noFill/>
+          </a:ln>
+        </p:spPr>
+        <p:style>
+          <a:lnRef idx="1">
+            <a:schemeClr val="accent1"/>
+          </a:lnRef>
+          <a:fillRef idx="3">
+            <a:schemeClr val="accent1"/>
+          </a:fillRef>
+          <a:effectRef idx="2">
+            <a:schemeClr val="accent1"/>
+          </a:effectRef>
+          <a:fontRef idx="minor">
+            <a:schemeClr val="lt1"/>
+          </a:fontRef>
+        </p:style>
+        <p:txBody>
+          <a:bodyPr rtlCol="0" anchor="ctr"/>
+          <a:lstStyle/>
+          <a:p>
+            <a:pPr algn="ctr"/>
+          </a:p>
+        </p:txBody>
+      </p:sp>
+      <p:sp>
+        <p:nvSpPr>
+          <p:cNvPr id="6" name="TextBox 5"/>
+          <p:cNvSpPr txBox="1"/>
+          <p:nvPr/>
+        </p:nvSpPr>
+        <p:spPr>
+          <a:xfrm>
+            <a:off x="288000" y="666000"/>
+            <a:ext cx="11616119" cy="324000"/>
+          </a:xfrm>
+          <a:prstGeom prst="rect">
+            <a:avLst/>
+          </a:prstGeom>
+          <a:noFill/>
+        </p:spPr>
+        <p:txBody>
+          <a:bodyPr wrap="square">
+            <a:spAutoFit/>
+          </a:bodyPr>
+          <a:lstStyle/>
+          <a:p>
+            <a:pPr algn="l"/>
+            <a:r>
+              <a:rPr sz="1400" b="0">
+                <a:solidFill>
+                  <a:srgbClr val="555C66"/>
+                </a:solidFill>
+                <a:latin typeface="Calibri"/>
+              </a:rPr>
+              <a:t>Понятие, назначение, классификация</a:t>
+            </a:r>
+          </a:p>
+        </p:txBody>
+      </p:sp>
+      <p:sp>
+        <p:nvSpPr>
+          <p:cNvPr id="7" name="TextBox 6"/>
+          <p:cNvSpPr txBox="1"/>
+          <p:nvPr/>
+        </p:nvSpPr>
+        <p:spPr>
+          <a:xfrm>
+            <a:off x="324000" y="1044000"/>
+            <a:ext cx="6349265" cy="5418000"/>
+          </a:xfrm>
+          <a:prstGeom prst="rect">
+            <a:avLst/>
+          </a:prstGeom>
+          <a:noFill/>
+        </p:spPr>
+        <p:txBody>
+          <a:bodyPr wrap="square">
+            <a:spAutoFit/>
+          </a:bodyPr>
+          <a:lstStyle/>
+          <a:p>
+            <a:pPr algn="l"/>
+            <a:r>
+              <a:rPr sz="1800" b="1">
+                <a:solidFill>
+                  <a:srgbClr val="0F2D52"/>
+                </a:solidFill>
+                <a:latin typeface="Calibri"/>
+              </a:rPr>
+              <a:t>Определение</a:t>
+            </a:r>
+          </a:p>
+          <a:p>
+            <a:pPr>
+              <a:spcBef>
+                <a:spcPts val="400"/>
+              </a:spcBef>
+            </a:pPr>
+            <a:r>
+              <a:rPr sz="1500">
+                <a:solidFill>
+                  <a:srgbClr val="1A1F2B"/>
+                </a:solidFill>
+                <a:latin typeface="Calibri"/>
+              </a:rPr>
+              <a:t>Система управления задачами (Issue / Task Tracking System) — программное средство для регистрации, декомпозиции, планирования и контроля задач проектной команды.</a:t>
+            </a:r>
+          </a:p>
+          <a:p>
+            <a:pPr>
+              <a:spcBef>
+                <a:spcPts val="1400"/>
+              </a:spcBef>
+            </a:pPr>
+            <a:r>
+              <a:rPr sz="1800" b="1">
+                <a:solidFill>
+                  <a:srgbClr val="0F2D52"/>
+                </a:solidFill>
+                <a:latin typeface="Calibri"/>
+              </a:rPr>
+              <a:t>Базовые функции</a:t>
+            </a:r>
+          </a:p>
+          <a:p>
+            <a:pPr>
+              <a:spcBef>
+                <a:spcPts val="300"/>
+              </a:spcBef>
+            </a:pPr>
+            <a:r>
+              <a:rPr sz="1400">
+                <a:solidFill>
+                  <a:srgbClr val="1A1F2B"/>
+                </a:solidFill>
+                <a:latin typeface="Calibri"/>
+              </a:rPr>
+              <a:t>•  регистрация задач, ошибок и пользовательских историй;</a:t>
+            </a:r>
+          </a:p>
+          <a:p>
+            <a:pPr>
+              <a:spcBef>
+                <a:spcPts val="300"/>
+              </a:spcBef>
+            </a:pPr>
+            <a:r>
+              <a:rPr sz="1400">
+                <a:solidFill>
+                  <a:srgbClr val="1A1F2B"/>
+                </a:solidFill>
+                <a:latin typeface="Calibri"/>
+              </a:rPr>
+              <a:t>•  управление статусами и жизненным циклом задач;</a:t>
+            </a:r>
+          </a:p>
+          <a:p>
+            <a:pPr>
+              <a:spcBef>
+                <a:spcPts val="300"/>
+              </a:spcBef>
+            </a:pPr>
+            <a:r>
+              <a:rPr sz="1400">
+                <a:solidFill>
+                  <a:srgbClr val="1A1F2B"/>
+                </a:solidFill>
+                <a:latin typeface="Calibri"/>
+              </a:rPr>
+              <a:t>•  приоритизация и оценка трудозатрат;</a:t>
+            </a:r>
+          </a:p>
+          <a:p>
+            <a:pPr>
+              <a:spcBef>
+                <a:spcPts val="300"/>
+              </a:spcBef>
+            </a:pPr>
+            <a:r>
+              <a:rPr sz="1400">
+                <a:solidFill>
+                  <a:srgbClr val="1A1F2B"/>
+                </a:solidFill>
+                <a:latin typeface="Calibri"/>
+              </a:rPr>
+              <a:t>•  коммуникация (комментарии, уведомления, упоминания);</a:t>
+            </a:r>
+          </a:p>
+          <a:p>
+            <a:pPr>
+              <a:spcBef>
+                <a:spcPts val="300"/>
+              </a:spcBef>
+            </a:pPr>
+            <a:r>
+              <a:rPr sz="1400">
+                <a:solidFill>
+                  <a:srgbClr val="1A1F2B"/>
+                </a:solidFill>
+                <a:latin typeface="Calibri"/>
+              </a:rPr>
+              <a:t>•  отчётность и метрики (burndown, velocity, lead time).</a:t>
+            </a:r>
+          </a:p>
+        </p:txBody>
+      </p:sp>
+      <p:sp>
+        <p:nvSpPr>
+          <p:cNvPr id="8" name="Rounded Rectangle 7"/>
+          <p:cNvSpPr/>
+          <p:nvPr/>
+        </p:nvSpPr>
+        <p:spPr>
+          <a:xfrm>
+            <a:off x="7250471" y="1044000"/>
+            <a:ext cx="4617647" cy="4984560"/>
+          </a:xfrm>
+          <a:prstGeom prst="roundRect">
+            <a:avLst>
+              <a:gd name="adj" fmla="val 5000"/>
+            </a:avLst>
+          </a:prstGeom>
+          <a:solidFill>
+            <a:srgbClr val="F2F5F9"/>
+          </a:solidFill>
+          <a:ln>
+            <a:noFill/>
+          </a:ln>
+        </p:spPr>
+        <p:style>
+          <a:lnRef idx="1">
+            <a:schemeClr val="accent1"/>
+          </a:lnRef>
+          <a:fillRef idx="3">
+            <a:schemeClr val="accent1"/>
+          </a:fillRef>
+          <a:effectRef idx="2">
+            <a:schemeClr val="accent1"/>
+          </a:effectRef>
+          <a:fontRef idx="minor">
+            <a:schemeClr val="lt1"/>
+          </a:fontRef>
+        </p:style>
+        <p:txBody>
+          <a:bodyPr rtlCol="0" anchor="ctr"/>
+          <a:lstStyle/>
+          <a:p>
+            <a:pPr algn="ctr"/>
+          </a:p>
+        </p:txBody>
+      </p:sp>
+      <p:sp>
+        <p:nvSpPr>
+          <p:cNvPr id="9" name="TextBox 8"/>
+          <p:cNvSpPr txBox="1"/>
+          <p:nvPr/>
+        </p:nvSpPr>
+        <p:spPr>
+          <a:xfrm>
+            <a:off x="7430471" y="1188000"/>
+            <a:ext cx="4257647" cy="4696560"/>
+          </a:xfrm>
+          <a:prstGeom prst="rect">
+            <a:avLst/>
+          </a:prstGeom>
+          <a:noFill/>
+        </p:spPr>
+        <p:txBody>
+          <a:bodyPr wrap="square">
+            <a:spAutoFit/>
+          </a:bodyPr>
+          <a:lstStyle/>
+          <a:p>
+            <a:pPr algn="l"/>
+            <a:r>
+              <a:rPr sz="1800" b="1">
+                <a:solidFill>
+                  <a:srgbClr val="1F77B4"/>
+                </a:solidFill>
+                <a:latin typeface="Calibri"/>
+              </a:rPr>
+              <a:t>Классификация</a:t>
+            </a:r>
+          </a:p>
+          <a:p>
+            <a:pPr>
+              <a:spcBef>
+                <a:spcPts val="800"/>
+              </a:spcBef>
+            </a:pPr>
+            <a:r>
+              <a:rPr sz="1400" b="1">
+                <a:solidFill>
+                  <a:srgbClr val="0F2D52"/>
+                </a:solidFill>
+                <a:latin typeface="Calibri"/>
+              </a:rPr>
+              <a:t>По модели:  </a:t>
+            </a:r>
+            <a:r>
+              <a:rPr sz="1400">
+                <a:solidFill>
+                  <a:srgbClr val="1A1F2B"/>
+                </a:solidFill>
+                <a:latin typeface="Calibri"/>
+              </a:rPr>
+              <a:t>SaaS / on-premise / self-hosted</a:t>
+            </a:r>
+          </a:p>
+          <a:p>
+            <a:pPr>
+              <a:spcBef>
+                <a:spcPts val="800"/>
+              </a:spcBef>
+            </a:pPr>
+            <a:r>
+              <a:rPr sz="1400" b="1">
+                <a:solidFill>
+                  <a:srgbClr val="0F2D52"/>
+                </a:solidFill>
+                <a:latin typeface="Calibri"/>
+              </a:rPr>
+              <a:t>По методологии:  </a:t>
+            </a:r>
+            <a:r>
+              <a:rPr sz="1400">
+                <a:solidFill>
+                  <a:srgbClr val="1A1F2B"/>
+                </a:solidFill>
+                <a:latin typeface="Calibri"/>
+              </a:rPr>
+              <a:t>Kanban · Scrum · Waterfall</a:t>
+            </a:r>
+          </a:p>
+          <a:p>
+            <a:pPr>
+              <a:spcBef>
+                <a:spcPts val="800"/>
+              </a:spcBef>
+            </a:pPr>
+            <a:r>
+              <a:rPr sz="1400" b="1">
+                <a:solidFill>
+                  <a:srgbClr val="0F2D52"/>
+                </a:solidFill>
+                <a:latin typeface="Calibri"/>
+              </a:rPr>
+              <a:t>По арендности:  </a:t>
+            </a:r>
+            <a:r>
+              <a:rPr sz="1400">
+                <a:solidFill>
+                  <a:srgbClr val="1A1F2B"/>
+                </a:solidFill>
+                <a:latin typeface="Calibri"/>
+              </a:rPr>
+              <a:t>Single-tenant · Multi-tenant</a:t>
+            </a:r>
+          </a:p>
+          <a:p>
+            <a:pPr>
+              <a:spcBef>
+                <a:spcPts val="800"/>
+              </a:spcBef>
+            </a:pPr>
+            <a:r>
+              <a:rPr sz="1400" b="1">
+                <a:solidFill>
+                  <a:srgbClr val="0F2D52"/>
+                </a:solidFill>
+                <a:latin typeface="Calibri"/>
+              </a:rPr>
+              <a:t>По интеграции:  </a:t>
+            </a:r>
+            <a:r>
+              <a:rPr sz="1400">
+                <a:solidFill>
+                  <a:srgbClr val="1A1F2B"/>
+                </a:solidFill>
+                <a:latin typeface="Calibri"/>
+              </a:rPr>
+              <a:t>Standalone · DevOps-стек</a:t>
+            </a:r>
+          </a:p>
+        </p:txBody>
+      </p:sp>
+      <p:sp>
+        <p:nvSpPr>
+          <p:cNvPr id="10" name="TextBox 9"/>
+          <p:cNvSpPr txBox="1"/>
+          <p:nvPr/>
+        </p:nvSpPr>
+        <p:spPr>
+          <a:xfrm>
+            <a:off x="288000" y="6534000"/>
+            <a:ext cx="11616119" cy="251999"/>
+          </a:xfrm>
+          <a:prstGeom prst="rect">
+            <a:avLst/>
+          </a:prstGeom>
+          <a:noFill/>
+        </p:spPr>
+        <p:txBody>
+          <a:bodyPr wrap="none">
+            <a:spAutoFit/>
+          </a:bodyPr>
+          <a:lstStyle/>
+          <a:p>
+            <a:pPr algn="l"/>
+            <a:r>
+              <a:rPr sz="1000">
+                <a:solidFill>
+                  <a:srgbClr val="555C66"/>
+                </a:solidFill>
+                <a:latin typeface="Calibri"/>
+              </a:rPr>
+              <a:t>TaskHub · защита курсовой работы</a:t>
+            </a:r>
+          </a:p>
+        </p:txBody>
+      </p:sp>
+      <p:sp>
+        <p:nvSpPr>
+          <p:cNvPr id="11" name="TextBox 10"/>
+          <p:cNvSpPr txBox="1"/>
+          <p:nvPr/>
+        </p:nvSpPr>
+        <p:spPr>
+          <a:xfrm>
+            <a:off x="11292119" y="6534000"/>
+            <a:ext cx="720000" cy="251999"/>
+          </a:xfrm>
+          <a:prstGeom prst="rect">
+            <a:avLst/>
+          </a:prstGeom>
+          <a:noFill/>
+        </p:spPr>
+        <p:txBody>
+          <a:bodyPr wrap="none">
+            <a:spAutoFit/>
+          </a:bodyPr>
+          <a:lstStyle/>
+          <a:p>
+            <a:pPr algn="r"/>
+            <a:r>
+              <a:rPr sz="1000">
+                <a:solidFill>
+                  <a:srgbClr val="555C66"/>
+                </a:solidFill>
+                <a:latin typeface="Calibri"/>
+              </a:rPr>
+              <a:t>5 / 15</a:t>
+            </a:r>
+          </a:p>
+        </p:txBody>
+      </p:sp>
+    </p:spTree>
+  </p:cSld>
+  <p:clrMapOvr>
+    <a:masterClrMapping/>
+  </p:clrMapOvr>
+</p:sld>
+</file>
+
+<file path=ppt/slides/slide6.xml><?xml version="1.0" encoding="utf-8"?>
 <p:sld xmlns:a="http://schemas.openxmlformats.org/drawingml/2006/main" xmlns:p="http://schemas.openxmlformats.org/presentationml/2006/main" xmlns:r="http://schemas.openxmlformats.org/officeDocument/2006/relationships">
   <p:cSld>
     <p:spTree>
@@ -9731,421 +9071,6 @@
                 </a:solidFill>
                 <a:latin typeface="Calibri"/>
               </a:rPr>
-              <a:t>5 / 15</a:t>
-            </a:r>
-          </a:p>
-        </p:txBody>
-      </p:sp>
-    </p:spTree>
-  </p:cSld>
-  <p:clrMapOvr>
-    <a:masterClrMapping/>
-  </p:clrMapOvr>
-</p:sld>
-</file>
-
-<file path=ppt/slides/slide6.xml><?xml version="1.0" encoding="utf-8"?>
-<p:sld xmlns:a="http://schemas.openxmlformats.org/drawingml/2006/main" xmlns:p="http://schemas.openxmlformats.org/presentationml/2006/main" xmlns:r="http://schemas.openxmlformats.org/officeDocument/2006/relationships">
-  <p:cSld>
-    <p:spTree>
-      <p:nvGrpSpPr>
-        <p:cNvPr id="1" name=""/>
-        <p:cNvGrpSpPr/>
-        <p:nvPr/>
-      </p:nvGrpSpPr>
-      <p:grpSpPr/>
-      <p:sp>
-        <p:nvSpPr>
-          <p:cNvPr id="2" name="Rectangle 1"/>
-          <p:cNvSpPr/>
-          <p:nvPr/>
-        </p:nvSpPr>
-        <p:spPr>
-          <a:xfrm>
-            <a:off x="0" y="0"/>
-            <a:ext cx="12192119" cy="6858000"/>
-          </a:xfrm>
-          <a:prstGeom prst="rect">
-            <a:avLst/>
-          </a:prstGeom>
-          <a:solidFill>
-            <a:srgbClr val="FFFFFF"/>
-          </a:solidFill>
-          <a:ln>
-            <a:noFill/>
-          </a:ln>
-          <a:effectLst/>
-        </p:spPr>
-        <p:style>
-          <a:lnRef idx="1">
-            <a:schemeClr val="accent1"/>
-          </a:lnRef>
-          <a:fillRef idx="3">
-            <a:schemeClr val="accent1"/>
-          </a:fillRef>
-          <a:effectRef idx="2">
-            <a:schemeClr val="accent1"/>
-          </a:effectRef>
-          <a:fontRef idx="minor">
-            <a:schemeClr val="lt1"/>
-          </a:fontRef>
-        </p:style>
-        <p:txBody>
-          <a:bodyPr rtlCol="0" anchor="ctr"/>
-          <a:lstStyle/>
-          <a:p>
-            <a:pPr algn="ctr"/>
-          </a:p>
-        </p:txBody>
-      </p:sp>
-      <p:sp>
-        <p:nvSpPr>
-          <p:cNvPr id="3" name="Rectangle 2"/>
-          <p:cNvSpPr/>
-          <p:nvPr/>
-        </p:nvSpPr>
-        <p:spPr>
-          <a:xfrm>
-            <a:off x="0" y="0"/>
-            <a:ext cx="12192119" cy="576000"/>
-          </a:xfrm>
-          <a:prstGeom prst="rect">
-            <a:avLst/>
-          </a:prstGeom>
-          <a:solidFill>
-            <a:srgbClr val="0F2D52"/>
-          </a:solidFill>
-          <a:ln>
-            <a:noFill/>
-          </a:ln>
-        </p:spPr>
-        <p:style>
-          <a:lnRef idx="1">
-            <a:schemeClr val="accent1"/>
-          </a:lnRef>
-          <a:fillRef idx="3">
-            <a:schemeClr val="accent1"/>
-          </a:fillRef>
-          <a:effectRef idx="2">
-            <a:schemeClr val="accent1"/>
-          </a:effectRef>
-          <a:fontRef idx="minor">
-            <a:schemeClr val="lt1"/>
-          </a:fontRef>
-        </p:style>
-        <p:txBody>
-          <a:bodyPr rtlCol="0" anchor="ctr"/>
-          <a:lstStyle/>
-          <a:p>
-            <a:pPr algn="ctr"/>
-          </a:p>
-        </p:txBody>
-      </p:sp>
-      <p:sp>
-        <p:nvSpPr>
-          <p:cNvPr id="4" name="TextBox 3"/>
-          <p:cNvSpPr txBox="1"/>
-          <p:nvPr/>
-        </p:nvSpPr>
-        <p:spPr>
-          <a:xfrm>
-            <a:off x="288000" y="54000"/>
-            <a:ext cx="11616119" cy="503999"/>
-          </a:xfrm>
-          <a:prstGeom prst="rect">
-            <a:avLst/>
-          </a:prstGeom>
-          <a:noFill/>
-        </p:spPr>
-        <p:txBody>
-          <a:bodyPr wrap="square" tIns="0" bIns="0">
-            <a:spAutoFit/>
-          </a:bodyPr>
-          <a:lstStyle/>
-          <a:p>
-            <a:pPr algn="l"/>
-            <a:r>
-              <a:rPr sz="2200" b="1">
-                <a:solidFill>
-                  <a:srgbClr val="FFFFFF"/>
-                </a:solidFill>
-                <a:latin typeface="Calibri"/>
-              </a:rPr>
-              <a:t>Архитектура прототипа TaskHub</a:t>
-            </a:r>
-          </a:p>
-        </p:txBody>
-      </p:sp>
-      <p:sp>
-        <p:nvSpPr>
-          <p:cNvPr id="5" name="Rectangle 4"/>
-          <p:cNvSpPr/>
-          <p:nvPr/>
-        </p:nvSpPr>
-        <p:spPr>
-          <a:xfrm>
-            <a:off x="0" y="576000"/>
-            <a:ext cx="12192119" cy="28800"/>
-          </a:xfrm>
-          <a:prstGeom prst="rect">
-            <a:avLst/>
-          </a:prstGeom>
-          <a:solidFill>
-            <a:srgbClr val="1F77B4"/>
-          </a:solidFill>
-          <a:ln>
-            <a:noFill/>
-          </a:ln>
-        </p:spPr>
-        <p:style>
-          <a:lnRef idx="1">
-            <a:schemeClr val="accent1"/>
-          </a:lnRef>
-          <a:fillRef idx="3">
-            <a:schemeClr val="accent1"/>
-          </a:fillRef>
-          <a:effectRef idx="2">
-            <a:schemeClr val="accent1"/>
-          </a:effectRef>
-          <a:fontRef idx="minor">
-            <a:schemeClr val="lt1"/>
-          </a:fontRef>
-        </p:style>
-        <p:txBody>
-          <a:bodyPr rtlCol="0" anchor="ctr"/>
-          <a:lstStyle/>
-          <a:p>
-            <a:pPr algn="ctr"/>
-          </a:p>
-        </p:txBody>
-      </p:sp>
-      <p:sp>
-        <p:nvSpPr>
-          <p:cNvPr id="6" name="TextBox 5"/>
-          <p:cNvSpPr txBox="1"/>
-          <p:nvPr/>
-        </p:nvSpPr>
-        <p:spPr>
-          <a:xfrm>
-            <a:off x="288000" y="666000"/>
-            <a:ext cx="11616119" cy="324000"/>
-          </a:xfrm>
-          <a:prstGeom prst="rect">
-            <a:avLst/>
-          </a:prstGeom>
-          <a:noFill/>
-        </p:spPr>
-        <p:txBody>
-          <a:bodyPr wrap="square">
-            <a:spAutoFit/>
-          </a:bodyPr>
-          <a:lstStyle/>
-          <a:p>
-            <a:pPr algn="l"/>
-            <a:r>
-              <a:rPr sz="1400" b="0">
-                <a:solidFill>
-                  <a:srgbClr val="555C66"/>
-                </a:solidFill>
-                <a:latin typeface="Calibri"/>
-              </a:rPr>
-              <a:t>Трёхуровневая SPA-архитектура с асинхронной шиной событий</a:t>
-            </a:r>
-          </a:p>
-        </p:txBody>
-      </p:sp>
-      <p:sp>
-        <p:nvSpPr>
-          <p:cNvPr id="7" name="TextBox 6"/>
-          <p:cNvSpPr txBox="1"/>
-          <p:nvPr/>
-        </p:nvSpPr>
-        <p:spPr>
-          <a:xfrm>
-            <a:off x="324000" y="1044000"/>
-            <a:ext cx="5772059" cy="5418000"/>
-          </a:xfrm>
-          <a:prstGeom prst="rect">
-            <a:avLst/>
-          </a:prstGeom>
-          <a:noFill/>
-        </p:spPr>
-        <p:txBody>
-          <a:bodyPr wrap="square">
-            <a:spAutoFit/>
-          </a:bodyPr>
-          <a:lstStyle/>
-          <a:p>
-            <a:pPr algn="l">
-              <a:spcAft>
-                <a:spcPts val="600"/>
-              </a:spcAft>
-            </a:pPr>
-            <a:r>
-              <a:rPr sz="1700">
-                <a:solidFill>
-                  <a:srgbClr val="1A1F2B"/>
-                </a:solidFill>
-                <a:latin typeface="Calibri"/>
-              </a:rPr>
-              <a:t>•  Frontend: React 18 + Vite + TanStack Query + Zustand.</a:t>
-            </a:r>
-          </a:p>
-          <a:p>
-            <a:pPr algn="l">
-              <a:spcAft>
-                <a:spcPts val="600"/>
-              </a:spcAft>
-            </a:pPr>
-            <a:r>
-              <a:rPr sz="1700">
-                <a:solidFill>
-                  <a:srgbClr val="1A1F2B"/>
-                </a:solidFill>
-                <a:latin typeface="Calibri"/>
-              </a:rPr>
-              <a:t>•  Backend: NestJS + TypeORM, 9 модулей (Auth, Tenants, Users, Projects, Issues, Search, Notifications, Mail, Health).</a:t>
-            </a:r>
-          </a:p>
-          <a:p>
-            <a:pPr algn="l">
-              <a:spcAft>
-                <a:spcPts val="600"/>
-              </a:spcAft>
-            </a:pPr>
-            <a:r>
-              <a:rPr sz="1700">
-                <a:solidFill>
-                  <a:srgbClr val="1A1F2B"/>
-                </a:solidFill>
-                <a:latin typeface="Calibri"/>
-              </a:rPr>
-              <a:t>•  Хранилища: PostgreSQL 16 (RLS), Redis (кеш и pub/sub), MinIO (вложения).</a:t>
-            </a:r>
-          </a:p>
-          <a:p>
-            <a:pPr algn="l">
-              <a:spcAft>
-                <a:spcPts val="600"/>
-              </a:spcAft>
-            </a:pPr>
-            <a:r>
-              <a:rPr sz="1700">
-                <a:solidFill>
-                  <a:srgbClr val="1A1F2B"/>
-                </a:solidFill>
-                <a:latin typeface="Calibri"/>
-              </a:rPr>
-              <a:t>•  Реал-тайм: WebSocket (Socket.IO) + EventEmitter для развязки слоёв.</a:t>
-            </a:r>
-          </a:p>
-          <a:p>
-            <a:pPr algn="l">
-              <a:spcAft>
-                <a:spcPts val="600"/>
-              </a:spcAft>
-            </a:pPr>
-            <a:r>
-              <a:rPr sz="1700">
-                <a:solidFill>
-                  <a:srgbClr val="1A1F2B"/>
-                </a:solidFill>
-                <a:latin typeface="Calibri"/>
-              </a:rPr>
-              <a:t>•  Развёртывание: Docker Compose, обратный прокси Traefik.</a:t>
-            </a:r>
-          </a:p>
-        </p:txBody>
-      </p:sp>
-      <p:pic>
-        <p:nvPicPr>
-          <p:cNvPr id="8" name="Picture 7" descr="component.png"/>
-          <p:cNvPicPr>
-            <a:picLocks noChangeAspect="1"/>
-          </p:cNvPicPr>
-          <p:nvPr/>
-        </p:nvPicPr>
-        <p:blipFill>
-          <a:blip r:embed="rId2"/>
-          <a:stretch>
-            <a:fillRect/>
-          </a:stretch>
-        </p:blipFill>
-        <p:spPr>
-          <a:xfrm>
-            <a:off x="6673265" y="1044000"/>
-            <a:ext cx="5194853" cy="5418000"/>
-          </a:xfrm>
-          <a:prstGeom prst="rect">
-            <a:avLst/>
-          </a:prstGeom>
-        </p:spPr>
-      </p:pic>
-      <p:sp>
-        <p:nvSpPr>
-          <p:cNvPr id="9" name="TextBox 8"/>
-          <p:cNvSpPr txBox="1"/>
-          <p:nvPr/>
-        </p:nvSpPr>
-        <p:spPr>
-          <a:xfrm>
-            <a:off x="288000" y="6534000"/>
-            <a:ext cx="11616119" cy="251999"/>
-          </a:xfrm>
-          <a:prstGeom prst="rect">
-            <a:avLst/>
-          </a:prstGeom>
-          <a:noFill/>
-        </p:spPr>
-        <p:txBody>
-          <a:bodyPr wrap="none">
-            <a:spAutoFit/>
-          </a:bodyPr>
-          <a:lstStyle/>
-          <a:p>
-            <a:pPr algn="l"/>
-            <a:r>
-              <a:rPr sz="1000">
-                <a:solidFill>
-                  <a:srgbClr val="555C66"/>
-                </a:solidFill>
-                <a:latin typeface="Calibri"/>
-              </a:rPr>
-              <a:t>TaskHub · защита курсовой работы</a:t>
-            </a:r>
-          </a:p>
-        </p:txBody>
-      </p:sp>
-      <p:sp>
-        <p:nvSpPr>
-          <p:cNvPr id="10" name="TextBox 9"/>
-          <p:cNvSpPr txBox="1"/>
-          <p:nvPr/>
-        </p:nvSpPr>
-        <p:spPr>
-          <a:xfrm>
-            <a:off x="11292119" y="6534000"/>
-            <a:ext cx="720000" cy="251999"/>
-          </a:xfrm>
-          <a:prstGeom prst="rect">
-            <a:avLst/>
-          </a:prstGeom>
-          <a:noFill/>
-        </p:spPr>
-        <p:txBody>
-          <a:bodyPr wrap="none">
-            <a:spAutoFit/>
-          </a:bodyPr>
-          <a:lstStyle/>
-          <a:p>
-            <a:pPr algn="r"/>
-            <a:r>
-              <a:rPr sz="1000">
-                <a:solidFill>
-                  <a:srgbClr val="555C66"/>
-                </a:solidFill>
-                <a:latin typeface="Calibri"/>
-              </a:rPr>
               <a:t>6 / 15</a:t>
             </a:r>
           </a:p>
@@ -10286,7 +9211,7 @@
                 </a:solidFill>
                 <a:latin typeface="Calibri"/>
               </a:rPr>
-              <a:t>UML: Use Case</a:t>
+              <a:t>1.3. UML 2.5 как инструмент проектирования</a:t>
             </a:r>
           </a:p>
         </p:txBody>
@@ -10364,45 +9289,109 @@
                 </a:solidFill>
                 <a:latin typeface="Calibri"/>
               </a:rPr>
-              <a:t>Акторы и сценарии использования системы</a:t>
-            </a:r>
-          </a:p>
-        </p:txBody>
-      </p:sp>
-      <p:pic>
-        <p:nvPicPr>
-          <p:cNvPr id="7" name="Picture 6" descr="use-case.png"/>
-          <p:cNvPicPr>
-            <a:picLocks noChangeAspect="1"/>
-          </p:cNvPicPr>
-          <p:nvPr/>
-        </p:nvPicPr>
-        <p:blipFill>
-          <a:blip r:embed="rId2"/>
-          <a:stretch>
-            <a:fillRect/>
-          </a:stretch>
-        </p:blipFill>
+              <a:t>Унифицированный язык моделирования: 14 типов диаграмм</a:t>
+            </a:r>
+          </a:p>
+        </p:txBody>
+      </p:sp>
+      <p:sp>
+        <p:nvSpPr>
+          <p:cNvPr id="7" name="Rounded Rectangle 6"/>
+          <p:cNvSpPr/>
+          <p:nvPr/>
+        </p:nvSpPr>
         <p:spPr>
           <a:xfrm>
             <a:off x="324000" y="1044000"/>
-            <a:ext cx="6926471" cy="5418000"/>
-          </a:xfrm>
-          <a:prstGeom prst="rect">
-            <a:avLst/>
-          </a:prstGeom>
-        </p:spPr>
-      </p:pic>
-      <p:sp>
-        <p:nvSpPr>
-          <p:cNvPr id="8" name="TextBox 7"/>
+            <a:ext cx="5592059" cy="3250800"/>
+          </a:xfrm>
+          <a:prstGeom prst="roundRect">
+            <a:avLst>
+              <a:gd name="adj" fmla="val 5000"/>
+            </a:avLst>
+          </a:prstGeom>
+          <a:solidFill>
+            <a:srgbClr val="F2F5F9"/>
+          </a:solidFill>
+          <a:ln>
+            <a:noFill/>
+          </a:ln>
+        </p:spPr>
+        <p:style>
+          <a:lnRef idx="1">
+            <a:schemeClr val="accent1"/>
+          </a:lnRef>
+          <a:fillRef idx="3">
+            <a:schemeClr val="accent1"/>
+          </a:fillRef>
+          <a:effectRef idx="2">
+            <a:schemeClr val="accent1"/>
+          </a:effectRef>
+          <a:fontRef idx="minor">
+            <a:schemeClr val="lt1"/>
+          </a:fontRef>
+        </p:style>
+        <p:txBody>
+          <a:bodyPr rtlCol="0" anchor="ctr"/>
+          <a:lstStyle/>
+          <a:p>
+            <a:pPr algn="ctr"/>
+          </a:p>
+        </p:txBody>
+      </p:sp>
+      <p:sp>
+        <p:nvSpPr>
+          <p:cNvPr id="8" name="Rectangle 7"/>
+          <p:cNvSpPr/>
+          <p:nvPr/>
+        </p:nvSpPr>
+        <p:spPr>
+          <a:xfrm>
+            <a:off x="324000" y="1044000"/>
+            <a:ext cx="5592059" cy="251999"/>
+          </a:xfrm>
+          <a:prstGeom prst="rect">
+            <a:avLst/>
+          </a:prstGeom>
+          <a:solidFill>
+            <a:srgbClr val="0F2D52"/>
+          </a:solidFill>
+          <a:ln>
+            <a:noFill/>
+          </a:ln>
+        </p:spPr>
+        <p:style>
+          <a:lnRef idx="1">
+            <a:schemeClr val="accent1"/>
+          </a:lnRef>
+          <a:fillRef idx="3">
+            <a:schemeClr val="accent1"/>
+          </a:fillRef>
+          <a:effectRef idx="2">
+            <a:schemeClr val="accent1"/>
+          </a:effectRef>
+          <a:fontRef idx="minor">
+            <a:schemeClr val="lt1"/>
+          </a:fontRef>
+        </p:style>
+        <p:txBody>
+          <a:bodyPr rtlCol="0" anchor="ctr"/>
+          <a:lstStyle/>
+          <a:p>
+            <a:pPr algn="ctr"/>
+          </a:p>
+        </p:txBody>
+      </p:sp>
+      <p:sp>
+        <p:nvSpPr>
+          <p:cNvPr id="9" name="TextBox 8"/>
           <p:cNvSpPr txBox="1"/>
           <p:nvPr/>
         </p:nvSpPr>
         <p:spPr>
           <a:xfrm>
-            <a:off x="7466471" y="1116000"/>
-            <a:ext cx="4401647" cy="5274000"/>
+            <a:off x="432000" y="1080000"/>
+            <a:ext cx="5376059" cy="216000"/>
           </a:xfrm>
           <a:prstGeom prst="rect">
             <a:avLst/>
@@ -10415,74 +9404,439 @@
           </a:bodyPr>
           <a:lstStyle/>
           <a:p>
-            <a:pPr algn="l">
+            <a:pPr algn="l"/>
+            <a:r>
+              <a:rPr sz="1600" b="1">
+                <a:solidFill>
+                  <a:srgbClr val="FFFFFF"/>
+                </a:solidFill>
+                <a:latin typeface="Calibri"/>
+              </a:rPr>
+              <a:t>Структурные диаграммы</a:t>
+            </a:r>
+          </a:p>
+        </p:txBody>
+      </p:sp>
+      <p:sp>
+        <p:nvSpPr>
+          <p:cNvPr id="10" name="TextBox 9"/>
+          <p:cNvSpPr txBox="1"/>
+          <p:nvPr/>
+        </p:nvSpPr>
+        <p:spPr>
+          <a:xfrm>
+            <a:off x="468000" y="1440000"/>
+            <a:ext cx="5304059" cy="2746801"/>
+          </a:xfrm>
+          <a:prstGeom prst="rect">
+            <a:avLst/>
+          </a:prstGeom>
+          <a:noFill/>
+        </p:spPr>
+        <p:txBody>
+          <a:bodyPr wrap="square">
+            <a:spAutoFit/>
+          </a:bodyPr>
+          <a:lstStyle/>
+          <a:p>
+            <a:pPr>
               <a:spcAft>
-                <a:spcPts val="600"/>
+                <a:spcPts val="300"/>
               </a:spcAft>
             </a:pPr>
             <a:r>
-              <a:rPr sz="1500">
+              <a:rPr sz="1400">
                 <a:solidFill>
                   <a:srgbClr val="1A1F2B"/>
                 </a:solidFill>
                 <a:latin typeface="Calibri"/>
               </a:rPr>
-              <a:t>•  4 актора: Administrator, Project Manager, Developer, Viewer.</a:t>
-            </a:r>
-          </a:p>
-          <a:p>
-            <a:pPr algn="l">
+              <a:t>•  Class — классы и связи</a:t>
+            </a:r>
+          </a:p>
+          <a:p>
+            <a:pPr>
               <a:spcAft>
-                <a:spcPts val="600"/>
+                <a:spcPts val="300"/>
               </a:spcAft>
             </a:pPr>
             <a:r>
-              <a:rPr sz="1500">
+              <a:rPr sz="1400">
                 <a:solidFill>
                   <a:srgbClr val="1A1F2B"/>
                 </a:solidFill>
                 <a:latin typeface="Calibri"/>
               </a:rPr>
-              <a:t>•  14 сценариев — от регистрации до управления задачами и поиска.</a:t>
-            </a:r>
-          </a:p>
-          <a:p>
-            <a:pPr algn="l">
+              <a:t>•  Component — компоненты и интерфейсы</a:t>
+            </a:r>
+          </a:p>
+          <a:p>
+            <a:pPr>
               <a:spcAft>
-                <a:spcPts val="600"/>
+                <a:spcPts val="300"/>
               </a:spcAft>
             </a:pPr>
             <a:r>
-              <a:rPr sz="1500">
+              <a:rPr sz="1400">
                 <a:solidFill>
                   <a:srgbClr val="1A1F2B"/>
                 </a:solidFill>
                 <a:latin typeface="Calibri"/>
               </a:rPr>
-              <a:t>•  Связи include / extend моделируют обязательные и опциональные расширения сценариев.</a:t>
-            </a:r>
-          </a:p>
-          <a:p>
-            <a:pPr algn="l">
+              <a:t>•  Deployment — узлы и артефакты</a:t>
+            </a:r>
+          </a:p>
+          <a:p>
+            <a:pPr>
               <a:spcAft>
-                <a:spcPts val="600"/>
+                <a:spcPts val="300"/>
               </a:spcAft>
             </a:pPr>
             <a:r>
+              <a:rPr sz="1400">
+                <a:solidFill>
+                  <a:srgbClr val="1A1F2B"/>
+                </a:solidFill>
+                <a:latin typeface="Calibri"/>
+              </a:rPr>
+              <a:t>•  Package — модульная декомпозиция</a:t>
+            </a:r>
+          </a:p>
+          <a:p>
+            <a:pPr>
+              <a:spcAft>
+                <a:spcPts val="300"/>
+              </a:spcAft>
+            </a:pPr>
+            <a:r>
+              <a:rPr sz="1400">
+                <a:solidFill>
+                  <a:srgbClr val="1A1F2B"/>
+                </a:solidFill>
+                <a:latin typeface="Calibri"/>
+              </a:rPr>
+              <a:t>•  Object, Composite, Profile</a:t>
+            </a:r>
+          </a:p>
+        </p:txBody>
+      </p:sp>
+      <p:sp>
+        <p:nvSpPr>
+          <p:cNvPr id="11" name="Rounded Rectangle 10"/>
+          <p:cNvSpPr/>
+          <p:nvPr/>
+        </p:nvSpPr>
+        <p:spPr>
+          <a:xfrm>
+            <a:off x="6096059" y="1044000"/>
+            <a:ext cx="5592059" cy="3250800"/>
+          </a:xfrm>
+          <a:prstGeom prst="roundRect">
+            <a:avLst>
+              <a:gd name="adj" fmla="val 5000"/>
+            </a:avLst>
+          </a:prstGeom>
+          <a:solidFill>
+            <a:srgbClr val="F2F5F9"/>
+          </a:solidFill>
+          <a:ln>
+            <a:noFill/>
+          </a:ln>
+        </p:spPr>
+        <p:style>
+          <a:lnRef idx="1">
+            <a:schemeClr val="accent1"/>
+          </a:lnRef>
+          <a:fillRef idx="3">
+            <a:schemeClr val="accent1"/>
+          </a:fillRef>
+          <a:effectRef idx="2">
+            <a:schemeClr val="accent1"/>
+          </a:effectRef>
+          <a:fontRef idx="minor">
+            <a:schemeClr val="lt1"/>
+          </a:fontRef>
+        </p:style>
+        <p:txBody>
+          <a:bodyPr rtlCol="0" anchor="ctr"/>
+          <a:lstStyle/>
+          <a:p>
+            <a:pPr algn="ctr"/>
+          </a:p>
+        </p:txBody>
+      </p:sp>
+      <p:sp>
+        <p:nvSpPr>
+          <p:cNvPr id="12" name="Rectangle 11"/>
+          <p:cNvSpPr/>
+          <p:nvPr/>
+        </p:nvSpPr>
+        <p:spPr>
+          <a:xfrm>
+            <a:off x="6096059" y="1044000"/>
+            <a:ext cx="5592059" cy="251999"/>
+          </a:xfrm>
+          <a:prstGeom prst="rect">
+            <a:avLst/>
+          </a:prstGeom>
+          <a:solidFill>
+            <a:srgbClr val="1F77B4"/>
+          </a:solidFill>
+          <a:ln>
+            <a:noFill/>
+          </a:ln>
+        </p:spPr>
+        <p:style>
+          <a:lnRef idx="1">
+            <a:schemeClr val="accent1"/>
+          </a:lnRef>
+          <a:fillRef idx="3">
+            <a:schemeClr val="accent1"/>
+          </a:fillRef>
+          <a:effectRef idx="2">
+            <a:schemeClr val="accent1"/>
+          </a:effectRef>
+          <a:fontRef idx="minor">
+            <a:schemeClr val="lt1"/>
+          </a:fontRef>
+        </p:style>
+        <p:txBody>
+          <a:bodyPr rtlCol="0" anchor="ctr"/>
+          <a:lstStyle/>
+          <a:p>
+            <a:pPr algn="ctr"/>
+          </a:p>
+        </p:txBody>
+      </p:sp>
+      <p:sp>
+        <p:nvSpPr>
+          <p:cNvPr id="13" name="TextBox 12"/>
+          <p:cNvSpPr txBox="1"/>
+          <p:nvPr/>
+        </p:nvSpPr>
+        <p:spPr>
+          <a:xfrm>
+            <a:off x="6204059" y="1080000"/>
+            <a:ext cx="5376059" cy="216000"/>
+          </a:xfrm>
+          <a:prstGeom prst="rect">
+            <a:avLst/>
+          </a:prstGeom>
+          <a:noFill/>
+        </p:spPr>
+        <p:txBody>
+          <a:bodyPr wrap="square">
+            <a:spAutoFit/>
+          </a:bodyPr>
+          <a:lstStyle/>
+          <a:p>
+            <a:pPr algn="l"/>
+            <a:r>
+              <a:rPr sz="1600" b="1">
+                <a:solidFill>
+                  <a:srgbClr val="FFFFFF"/>
+                </a:solidFill>
+                <a:latin typeface="Calibri"/>
+              </a:rPr>
+              <a:t>Поведенческие диаграммы</a:t>
+            </a:r>
+          </a:p>
+        </p:txBody>
+      </p:sp>
+      <p:sp>
+        <p:nvSpPr>
+          <p:cNvPr id="14" name="TextBox 13"/>
+          <p:cNvSpPr txBox="1"/>
+          <p:nvPr/>
+        </p:nvSpPr>
+        <p:spPr>
+          <a:xfrm>
+            <a:off x="6240059" y="1440000"/>
+            <a:ext cx="5304059" cy="2746801"/>
+          </a:xfrm>
+          <a:prstGeom prst="rect">
+            <a:avLst/>
+          </a:prstGeom>
+          <a:noFill/>
+        </p:spPr>
+        <p:txBody>
+          <a:bodyPr wrap="square">
+            <a:spAutoFit/>
+          </a:bodyPr>
+          <a:lstStyle/>
+          <a:p>
+            <a:pPr>
+              <a:spcAft>
+                <a:spcPts val="300"/>
+              </a:spcAft>
+            </a:pPr>
+            <a:r>
+              <a:rPr sz="1400">
+                <a:solidFill>
+                  <a:srgbClr val="1A1F2B"/>
+                </a:solidFill>
+                <a:latin typeface="Calibri"/>
+              </a:rPr>
+              <a:t>•  Use Case — сценарии использования</a:t>
+            </a:r>
+          </a:p>
+          <a:p>
+            <a:pPr>
+              <a:spcAft>
+                <a:spcPts val="300"/>
+              </a:spcAft>
+            </a:pPr>
+            <a:r>
+              <a:rPr sz="1400">
+                <a:solidFill>
+                  <a:srgbClr val="1A1F2B"/>
+                </a:solidFill>
+                <a:latin typeface="Calibri"/>
+              </a:rPr>
+              <a:t>•  Sequence — взаимодействие во времени</a:t>
+            </a:r>
+          </a:p>
+          <a:p>
+            <a:pPr>
+              <a:spcAft>
+                <a:spcPts val="300"/>
+              </a:spcAft>
+            </a:pPr>
+            <a:r>
+              <a:rPr sz="1400">
+                <a:solidFill>
+                  <a:srgbClr val="1A1F2B"/>
+                </a:solidFill>
+                <a:latin typeface="Calibri"/>
+              </a:rPr>
+              <a:t>•  Activity — поток управления</a:t>
+            </a:r>
+          </a:p>
+          <a:p>
+            <a:pPr>
+              <a:spcAft>
+                <a:spcPts val="300"/>
+              </a:spcAft>
+            </a:pPr>
+            <a:r>
+              <a:rPr sz="1400">
+                <a:solidFill>
+                  <a:srgbClr val="1A1F2B"/>
+                </a:solidFill>
+                <a:latin typeface="Calibri"/>
+              </a:rPr>
+              <a:t>•  State machine — конечный автомат</a:t>
+            </a:r>
+          </a:p>
+          <a:p>
+            <a:pPr>
+              <a:spcAft>
+                <a:spcPts val="300"/>
+              </a:spcAft>
+            </a:pPr>
+            <a:r>
+              <a:rPr sz="1400">
+                <a:solidFill>
+                  <a:srgbClr val="1A1F2B"/>
+                </a:solidFill>
+                <a:latin typeface="Calibri"/>
+              </a:rPr>
+              <a:t>•  Communication, Interaction overview, Timing</a:t>
+            </a:r>
+          </a:p>
+        </p:txBody>
+      </p:sp>
+      <p:sp>
+        <p:nvSpPr>
+          <p:cNvPr id="15" name="Rounded Rectangle 14"/>
+          <p:cNvSpPr/>
+          <p:nvPr/>
+        </p:nvSpPr>
+        <p:spPr>
+          <a:xfrm>
+            <a:off x="324000" y="4565700"/>
+            <a:ext cx="11544119" cy="1625400"/>
+          </a:xfrm>
+          <a:prstGeom prst="roundRect">
+            <a:avLst>
+              <a:gd name="adj" fmla="val 7000"/>
+            </a:avLst>
+          </a:prstGeom>
+          <a:solidFill>
+            <a:srgbClr val="0F2D52"/>
+          </a:solidFill>
+          <a:ln>
+            <a:noFill/>
+          </a:ln>
+        </p:spPr>
+        <p:style>
+          <a:lnRef idx="1">
+            <a:schemeClr val="accent1"/>
+          </a:lnRef>
+          <a:fillRef idx="3">
+            <a:schemeClr val="accent1"/>
+          </a:fillRef>
+          <a:effectRef idx="2">
+            <a:schemeClr val="accent1"/>
+          </a:effectRef>
+          <a:fontRef idx="minor">
+            <a:schemeClr val="lt1"/>
+          </a:fontRef>
+        </p:style>
+        <p:txBody>
+          <a:bodyPr rtlCol="0" anchor="ctr"/>
+          <a:lstStyle/>
+          <a:p>
+            <a:pPr algn="ctr"/>
+          </a:p>
+        </p:txBody>
+      </p:sp>
+      <p:sp>
+        <p:nvSpPr>
+          <p:cNvPr id="16" name="TextBox 15"/>
+          <p:cNvSpPr txBox="1"/>
+          <p:nvPr/>
+        </p:nvSpPr>
+        <p:spPr>
+          <a:xfrm>
+            <a:off x="504000" y="4673700"/>
+            <a:ext cx="11184119" cy="1409400"/>
+          </a:xfrm>
+          <a:prstGeom prst="rect">
+            <a:avLst/>
+          </a:prstGeom>
+          <a:noFill/>
+        </p:spPr>
+        <p:txBody>
+          <a:bodyPr wrap="square">
+            <a:spAutoFit/>
+          </a:bodyPr>
+          <a:lstStyle/>
+          <a:p>
+            <a:r>
+              <a:rPr sz="1500" b="1">
+                <a:solidFill>
+                  <a:srgbClr val="1F77B4"/>
+                </a:solidFill>
+                <a:latin typeface="Calibri"/>
+              </a:rPr>
+              <a:t>Для прототипа TaskHub выбраны: </a:t>
+            </a:r>
+            <a:r>
               <a:rPr sz="1500">
                 <a:solidFill>
-                  <a:srgbClr val="1A1F2B"/>
-                </a:solidFill>
-                <a:latin typeface="Calibri"/>
-              </a:rPr>
-              <a:t>•  Диаграмма зафиксировала функциональные требования к прототипу.</a:t>
-            </a:r>
-          </a:p>
-        </p:txBody>
-      </p:sp>
-      <p:sp>
-        <p:nvSpPr>
-          <p:cNvPr id="9" name="TextBox 8"/>
+                  <a:srgbClr val="FFFFFF"/>
+                </a:solidFill>
+                <a:latin typeface="Calibri"/>
+              </a:rPr>
+              <a:t>use case, class, ER, sequence (3 шт.), activity, state, component, deployment, package — 11 диаграмм, покрывающих структуру и поведение системы.</a:t>
+            </a:r>
+          </a:p>
+        </p:txBody>
+      </p:sp>
+      <p:sp>
+        <p:nvSpPr>
+          <p:cNvPr id="17" name="TextBox 16"/>
           <p:cNvSpPr txBox="1"/>
           <p:nvPr/>
         </p:nvSpPr>
@@ -10517,7 +9871,7 @@
       </p:sp>
       <p:sp>
         <p:nvSpPr>
-          <p:cNvPr id="10" name="TextBox 9"/>
+          <p:cNvPr id="18" name="TextBox 17"/>
           <p:cNvSpPr txBox="1"/>
           <p:nvPr/>
         </p:nvSpPr>
@@ -10685,7 +10039,7 @@
                 </a:solidFill>
                 <a:latin typeface="Calibri"/>
               </a:rPr>
-              <a:t>UML: Class diagram</a:t>
+              <a:t>Технологический стек</a:t>
             </a:r>
           </a:p>
         </p:txBody>
@@ -10763,45 +10117,109 @@
                 </a:solidFill>
                 <a:latin typeface="Calibri"/>
               </a:rPr>
-              <a:t>Доменная модель TaskHub</a:t>
-            </a:r>
-          </a:p>
-        </p:txBody>
-      </p:sp>
-      <p:pic>
-        <p:nvPicPr>
-          <p:cNvPr id="7" name="Picture 6" descr="class.png"/>
-          <p:cNvPicPr>
-            <a:picLocks noChangeAspect="1"/>
-          </p:cNvPicPr>
-          <p:nvPr/>
-        </p:nvPicPr>
-        <p:blipFill>
-          <a:blip r:embed="rId2"/>
-          <a:stretch>
-            <a:fillRect/>
-          </a:stretch>
-        </p:blipFill>
+              <a:t>Обоснованный выбор зрелых open-source инструментов</a:t>
+            </a:r>
+          </a:p>
+        </p:txBody>
+      </p:sp>
+      <p:sp>
+        <p:nvSpPr>
+          <p:cNvPr id="7" name="Rounded Rectangle 6"/>
+          <p:cNvSpPr/>
+          <p:nvPr/>
+        </p:nvSpPr>
         <p:spPr>
           <a:xfrm>
             <a:off x="324000" y="1044000"/>
-            <a:ext cx="6926471" cy="5418000"/>
-          </a:xfrm>
-          <a:prstGeom prst="rect">
-            <a:avLst/>
-          </a:prstGeom>
-        </p:spPr>
-      </p:pic>
-      <p:sp>
-        <p:nvSpPr>
-          <p:cNvPr id="8" name="TextBox 7"/>
+            <a:ext cx="3728039" cy="4876200"/>
+          </a:xfrm>
+          <a:prstGeom prst="roundRect">
+            <a:avLst>
+              <a:gd name="adj" fmla="val 5000"/>
+            </a:avLst>
+          </a:prstGeom>
+          <a:solidFill>
+            <a:srgbClr val="F2F5F9"/>
+          </a:solidFill>
+          <a:ln>
+            <a:noFill/>
+          </a:ln>
+        </p:spPr>
+        <p:style>
+          <a:lnRef idx="1">
+            <a:schemeClr val="accent1"/>
+          </a:lnRef>
+          <a:fillRef idx="3">
+            <a:schemeClr val="accent1"/>
+          </a:fillRef>
+          <a:effectRef idx="2">
+            <a:schemeClr val="accent1"/>
+          </a:effectRef>
+          <a:fontRef idx="minor">
+            <a:schemeClr val="lt1"/>
+          </a:fontRef>
+        </p:style>
+        <p:txBody>
+          <a:bodyPr rtlCol="0" anchor="ctr"/>
+          <a:lstStyle/>
+          <a:p>
+            <a:pPr algn="ctr"/>
+          </a:p>
+        </p:txBody>
+      </p:sp>
+      <p:sp>
+        <p:nvSpPr>
+          <p:cNvPr id="8" name="Rectangle 7"/>
+          <p:cNvSpPr/>
+          <p:nvPr/>
+        </p:nvSpPr>
+        <p:spPr>
+          <a:xfrm>
+            <a:off x="324000" y="1044000"/>
+            <a:ext cx="3728039" cy="251999"/>
+          </a:xfrm>
+          <a:prstGeom prst="rect">
+            <a:avLst/>
+          </a:prstGeom>
+          <a:solidFill>
+            <a:srgbClr val="1F77B4"/>
+          </a:solidFill>
+          <a:ln>
+            <a:noFill/>
+          </a:ln>
+        </p:spPr>
+        <p:style>
+          <a:lnRef idx="1">
+            <a:schemeClr val="accent1"/>
+          </a:lnRef>
+          <a:fillRef idx="3">
+            <a:schemeClr val="accent1"/>
+          </a:fillRef>
+          <a:effectRef idx="2">
+            <a:schemeClr val="accent1"/>
+          </a:effectRef>
+          <a:fontRef idx="minor">
+            <a:schemeClr val="lt1"/>
+          </a:fontRef>
+        </p:style>
+        <p:txBody>
+          <a:bodyPr rtlCol="0" anchor="ctr"/>
+          <a:lstStyle/>
+          <a:p>
+            <a:pPr algn="ctr"/>
+          </a:p>
+        </p:txBody>
+      </p:sp>
+      <p:sp>
+        <p:nvSpPr>
+          <p:cNvPr id="9" name="TextBox 8"/>
           <p:cNvSpPr txBox="1"/>
           <p:nvPr/>
         </p:nvSpPr>
         <p:spPr>
           <a:xfrm>
-            <a:off x="7466471" y="1116000"/>
-            <a:ext cx="4401647" cy="5274000"/>
+            <a:off x="432000" y="1080000"/>
+            <a:ext cx="3512039" cy="216000"/>
           </a:xfrm>
           <a:prstGeom prst="rect">
             <a:avLst/>
@@ -10814,74 +10232,625 @@
           </a:bodyPr>
           <a:lstStyle/>
           <a:p>
-            <a:pPr algn="l">
+            <a:pPr algn="l"/>
+            <a:r>
+              <a:rPr sz="1600" b="1">
+                <a:solidFill>
+                  <a:srgbClr val="FFFFFF"/>
+                </a:solidFill>
+                <a:latin typeface="Calibri"/>
+              </a:rPr>
+              <a:t>Frontend</a:t>
+            </a:r>
+          </a:p>
+        </p:txBody>
+      </p:sp>
+      <p:sp>
+        <p:nvSpPr>
+          <p:cNvPr id="10" name="TextBox 9"/>
+          <p:cNvSpPr txBox="1"/>
+          <p:nvPr/>
+        </p:nvSpPr>
+        <p:spPr>
+          <a:xfrm>
+            <a:off x="468000" y="1440000"/>
+            <a:ext cx="3440039" cy="4372201"/>
+          </a:xfrm>
+          <a:prstGeom prst="rect">
+            <a:avLst/>
+          </a:prstGeom>
+          <a:noFill/>
+        </p:spPr>
+        <p:txBody>
+          <a:bodyPr wrap="square">
+            <a:spAutoFit/>
+          </a:bodyPr>
+          <a:lstStyle/>
+          <a:p>
+            <a:pPr>
               <a:spcAft>
-                <a:spcPts val="600"/>
+                <a:spcPts val="400"/>
               </a:spcAft>
             </a:pPr>
             <a:r>
-              <a:rPr sz="1500">
+              <a:rPr sz="1600">
                 <a:solidFill>
                   <a:srgbClr val="1A1F2B"/>
                 </a:solidFill>
                 <a:latin typeface="Calibri"/>
               </a:rPr>
-              <a:t>•  11 ключевых сущностей: Tenant, User, Project, Sprint, Issue, …</a:t>
-            </a:r>
-          </a:p>
-          <a:p>
-            <a:pPr algn="l">
+              <a:t>•  React 18</a:t>
+            </a:r>
+          </a:p>
+          <a:p>
+            <a:pPr>
               <a:spcAft>
-                <a:spcPts val="600"/>
+                <a:spcPts val="400"/>
               </a:spcAft>
             </a:pPr>
             <a:r>
-              <a:rPr sz="1500">
+              <a:rPr sz="1600">
                 <a:solidFill>
                   <a:srgbClr val="1A1F2B"/>
                 </a:solidFill>
                 <a:latin typeface="Calibri"/>
               </a:rPr>
-              <a:t>•  5 перечислений: UserRole, IssueStatus, IssuePriority, SprintStatus, BoardType.</a:t>
-            </a:r>
-          </a:p>
-          <a:p>
-            <a:pPr algn="l">
+              <a:t>•  TypeScript</a:t>
+            </a:r>
+          </a:p>
+          <a:p>
+            <a:pPr>
               <a:spcAft>
-                <a:spcPts val="600"/>
+                <a:spcPts val="400"/>
               </a:spcAft>
             </a:pPr>
             <a:r>
-              <a:rPr sz="1500">
+              <a:rPr sz="1600">
                 <a:solidFill>
                   <a:srgbClr val="1A1F2B"/>
                 </a:solidFill>
                 <a:latin typeface="Calibri"/>
               </a:rPr>
-              <a:t>•  Композиция Tenant → Project → Issue моделирует владение данными.</a:t>
-            </a:r>
-          </a:p>
-          <a:p>
-            <a:pPr algn="l">
+              <a:t>•  Vite</a:t>
+            </a:r>
+          </a:p>
+          <a:p>
+            <a:pPr>
               <a:spcAft>
-                <a:spcPts val="600"/>
+                <a:spcPts val="400"/>
               </a:spcAft>
             </a:pPr>
             <a:r>
-              <a:rPr sz="1500">
+              <a:rPr sz="1600">
                 <a:solidFill>
                   <a:srgbClr val="1A1F2B"/>
                 </a:solidFill>
                 <a:latin typeface="Calibri"/>
               </a:rPr>
-              <a:t>•  Класс служит шаблоном TypeORM-сущностей в коде backend.</a:t>
-            </a:r>
-          </a:p>
-        </p:txBody>
-      </p:sp>
-      <p:sp>
-        <p:nvSpPr>
-          <p:cNvPr id="9" name="TextBox 8"/>
+              <a:t>•  TanStack Query</a:t>
+            </a:r>
+          </a:p>
+          <a:p>
+            <a:pPr>
+              <a:spcAft>
+                <a:spcPts val="400"/>
+              </a:spcAft>
+            </a:pPr>
+            <a:r>
+              <a:rPr sz="1600">
+                <a:solidFill>
+                  <a:srgbClr val="1A1F2B"/>
+                </a:solidFill>
+                <a:latin typeface="Calibri"/>
+              </a:rPr>
+              <a:t>•  Zustand</a:t>
+            </a:r>
+          </a:p>
+          <a:p>
+            <a:pPr>
+              <a:spcAft>
+                <a:spcPts val="400"/>
+              </a:spcAft>
+            </a:pPr>
+            <a:r>
+              <a:rPr sz="1600">
+                <a:solidFill>
+                  <a:srgbClr val="1A1F2B"/>
+                </a:solidFill>
+                <a:latin typeface="Calibri"/>
+              </a:rPr>
+              <a:t>•  Tailwind CSS</a:t>
+            </a:r>
+          </a:p>
+        </p:txBody>
+      </p:sp>
+      <p:sp>
+        <p:nvSpPr>
+          <p:cNvPr id="11" name="Rounded Rectangle 10"/>
+          <p:cNvSpPr/>
+          <p:nvPr/>
+        </p:nvSpPr>
+        <p:spPr>
+          <a:xfrm>
+            <a:off x="4232039" y="1044000"/>
+            <a:ext cx="3728039" cy="4876200"/>
+          </a:xfrm>
+          <a:prstGeom prst="roundRect">
+            <a:avLst>
+              <a:gd name="adj" fmla="val 5000"/>
+            </a:avLst>
+          </a:prstGeom>
+          <a:solidFill>
+            <a:srgbClr val="F2F5F9"/>
+          </a:solidFill>
+          <a:ln>
+            <a:noFill/>
+          </a:ln>
+        </p:spPr>
+        <p:style>
+          <a:lnRef idx="1">
+            <a:schemeClr val="accent1"/>
+          </a:lnRef>
+          <a:fillRef idx="3">
+            <a:schemeClr val="accent1"/>
+          </a:fillRef>
+          <a:effectRef idx="2">
+            <a:schemeClr val="accent1"/>
+          </a:effectRef>
+          <a:fontRef idx="minor">
+            <a:schemeClr val="lt1"/>
+          </a:fontRef>
+        </p:style>
+        <p:txBody>
+          <a:bodyPr rtlCol="0" anchor="ctr"/>
+          <a:lstStyle/>
+          <a:p>
+            <a:pPr algn="ctr"/>
+          </a:p>
+        </p:txBody>
+      </p:sp>
+      <p:sp>
+        <p:nvSpPr>
+          <p:cNvPr id="12" name="Rectangle 11"/>
+          <p:cNvSpPr/>
+          <p:nvPr/>
+        </p:nvSpPr>
+        <p:spPr>
+          <a:xfrm>
+            <a:off x="4232039" y="1044000"/>
+            <a:ext cx="3728039" cy="251999"/>
+          </a:xfrm>
+          <a:prstGeom prst="rect">
+            <a:avLst/>
+          </a:prstGeom>
+          <a:solidFill>
+            <a:srgbClr val="0F2D52"/>
+          </a:solidFill>
+          <a:ln>
+            <a:noFill/>
+          </a:ln>
+        </p:spPr>
+        <p:style>
+          <a:lnRef idx="1">
+            <a:schemeClr val="accent1"/>
+          </a:lnRef>
+          <a:fillRef idx="3">
+            <a:schemeClr val="accent1"/>
+          </a:fillRef>
+          <a:effectRef idx="2">
+            <a:schemeClr val="accent1"/>
+          </a:effectRef>
+          <a:fontRef idx="minor">
+            <a:schemeClr val="lt1"/>
+          </a:fontRef>
+        </p:style>
+        <p:txBody>
+          <a:bodyPr rtlCol="0" anchor="ctr"/>
+          <a:lstStyle/>
+          <a:p>
+            <a:pPr algn="ctr"/>
+          </a:p>
+        </p:txBody>
+      </p:sp>
+      <p:sp>
+        <p:nvSpPr>
+          <p:cNvPr id="13" name="TextBox 12"/>
+          <p:cNvSpPr txBox="1"/>
+          <p:nvPr/>
+        </p:nvSpPr>
+        <p:spPr>
+          <a:xfrm>
+            <a:off x="4340039" y="1080000"/>
+            <a:ext cx="3512039" cy="216000"/>
+          </a:xfrm>
+          <a:prstGeom prst="rect">
+            <a:avLst/>
+          </a:prstGeom>
+          <a:noFill/>
+        </p:spPr>
+        <p:txBody>
+          <a:bodyPr wrap="square">
+            <a:spAutoFit/>
+          </a:bodyPr>
+          <a:lstStyle/>
+          <a:p>
+            <a:pPr algn="l"/>
+            <a:r>
+              <a:rPr sz="1600" b="1">
+                <a:solidFill>
+                  <a:srgbClr val="FFFFFF"/>
+                </a:solidFill>
+                <a:latin typeface="Calibri"/>
+              </a:rPr>
+              <a:t>Backend</a:t>
+            </a:r>
+          </a:p>
+        </p:txBody>
+      </p:sp>
+      <p:sp>
+        <p:nvSpPr>
+          <p:cNvPr id="14" name="TextBox 13"/>
+          <p:cNvSpPr txBox="1"/>
+          <p:nvPr/>
+        </p:nvSpPr>
+        <p:spPr>
+          <a:xfrm>
+            <a:off x="4376039" y="1440000"/>
+            <a:ext cx="3440039" cy="4372201"/>
+          </a:xfrm>
+          <a:prstGeom prst="rect">
+            <a:avLst/>
+          </a:prstGeom>
+          <a:noFill/>
+        </p:spPr>
+        <p:txBody>
+          <a:bodyPr wrap="square">
+            <a:spAutoFit/>
+          </a:bodyPr>
+          <a:lstStyle/>
+          <a:p>
+            <a:pPr>
+              <a:spcAft>
+                <a:spcPts val="400"/>
+              </a:spcAft>
+            </a:pPr>
+            <a:r>
+              <a:rPr sz="1600">
+                <a:solidFill>
+                  <a:srgbClr val="1A1F2B"/>
+                </a:solidFill>
+                <a:latin typeface="Calibri"/>
+              </a:rPr>
+              <a:t>•  NestJS 10</a:t>
+            </a:r>
+          </a:p>
+          <a:p>
+            <a:pPr>
+              <a:spcAft>
+                <a:spcPts val="400"/>
+              </a:spcAft>
+            </a:pPr>
+            <a:r>
+              <a:rPr sz="1600">
+                <a:solidFill>
+                  <a:srgbClr val="1A1F2B"/>
+                </a:solidFill>
+                <a:latin typeface="Calibri"/>
+              </a:rPr>
+              <a:t>•  TypeORM</a:t>
+            </a:r>
+          </a:p>
+          <a:p>
+            <a:pPr>
+              <a:spcAft>
+                <a:spcPts val="400"/>
+              </a:spcAft>
+            </a:pPr>
+            <a:r>
+              <a:rPr sz="1600">
+                <a:solidFill>
+                  <a:srgbClr val="1A1F2B"/>
+                </a:solidFill>
+                <a:latin typeface="Calibri"/>
+              </a:rPr>
+              <a:t>•  class-validator</a:t>
+            </a:r>
+          </a:p>
+          <a:p>
+            <a:pPr>
+              <a:spcAft>
+                <a:spcPts val="400"/>
+              </a:spcAft>
+            </a:pPr>
+            <a:r>
+              <a:rPr sz="1600">
+                <a:solidFill>
+                  <a:srgbClr val="1A1F2B"/>
+                </a:solidFill>
+                <a:latin typeface="Calibri"/>
+              </a:rPr>
+              <a:t>•  Passport JWT</a:t>
+            </a:r>
+          </a:p>
+          <a:p>
+            <a:pPr>
+              <a:spcAft>
+                <a:spcPts val="400"/>
+              </a:spcAft>
+            </a:pPr>
+            <a:r>
+              <a:rPr sz="1600">
+                <a:solidFill>
+                  <a:srgbClr val="1A1F2B"/>
+                </a:solidFill>
+                <a:latin typeface="Calibri"/>
+              </a:rPr>
+              <a:t>•  Socket.IO</a:t>
+            </a:r>
+          </a:p>
+          <a:p>
+            <a:pPr>
+              <a:spcAft>
+                <a:spcPts val="400"/>
+              </a:spcAft>
+            </a:pPr>
+            <a:r>
+              <a:rPr sz="1600">
+                <a:solidFill>
+                  <a:srgbClr val="1A1F2B"/>
+                </a:solidFill>
+                <a:latin typeface="Calibri"/>
+              </a:rPr>
+              <a:t>•  BullMQ</a:t>
+            </a:r>
+          </a:p>
+        </p:txBody>
+      </p:sp>
+      <p:sp>
+        <p:nvSpPr>
+          <p:cNvPr id="15" name="Rounded Rectangle 14"/>
+          <p:cNvSpPr/>
+          <p:nvPr/>
+        </p:nvSpPr>
+        <p:spPr>
+          <a:xfrm>
+            <a:off x="8140079" y="1044000"/>
+            <a:ext cx="3728039" cy="4876200"/>
+          </a:xfrm>
+          <a:prstGeom prst="roundRect">
+            <a:avLst>
+              <a:gd name="adj" fmla="val 5000"/>
+            </a:avLst>
+          </a:prstGeom>
+          <a:solidFill>
+            <a:srgbClr val="F2F5F9"/>
+          </a:solidFill>
+          <a:ln>
+            <a:noFill/>
+          </a:ln>
+        </p:spPr>
+        <p:style>
+          <a:lnRef idx="1">
+            <a:schemeClr val="accent1"/>
+          </a:lnRef>
+          <a:fillRef idx="3">
+            <a:schemeClr val="accent1"/>
+          </a:fillRef>
+          <a:effectRef idx="2">
+            <a:schemeClr val="accent1"/>
+          </a:effectRef>
+          <a:fontRef idx="minor">
+            <a:schemeClr val="lt1"/>
+          </a:fontRef>
+        </p:style>
+        <p:txBody>
+          <a:bodyPr rtlCol="0" anchor="ctr"/>
+          <a:lstStyle/>
+          <a:p>
+            <a:pPr algn="ctr"/>
+          </a:p>
+        </p:txBody>
+      </p:sp>
+      <p:sp>
+        <p:nvSpPr>
+          <p:cNvPr id="16" name="Rectangle 15"/>
+          <p:cNvSpPr/>
+          <p:nvPr/>
+        </p:nvSpPr>
+        <p:spPr>
+          <a:xfrm>
+            <a:off x="8140079" y="1044000"/>
+            <a:ext cx="3728039" cy="251999"/>
+          </a:xfrm>
+          <a:prstGeom prst="rect">
+            <a:avLst/>
+          </a:prstGeom>
+          <a:solidFill>
+            <a:srgbClr val="555C66"/>
+          </a:solidFill>
+          <a:ln>
+            <a:noFill/>
+          </a:ln>
+        </p:spPr>
+        <p:style>
+          <a:lnRef idx="1">
+            <a:schemeClr val="accent1"/>
+          </a:lnRef>
+          <a:fillRef idx="3">
+            <a:schemeClr val="accent1"/>
+          </a:fillRef>
+          <a:effectRef idx="2">
+            <a:schemeClr val="accent1"/>
+          </a:effectRef>
+          <a:fontRef idx="minor">
+            <a:schemeClr val="lt1"/>
+          </a:fontRef>
+        </p:style>
+        <p:txBody>
+          <a:bodyPr rtlCol="0" anchor="ctr"/>
+          <a:lstStyle/>
+          <a:p>
+            <a:pPr algn="ctr"/>
+          </a:p>
+        </p:txBody>
+      </p:sp>
+      <p:sp>
+        <p:nvSpPr>
+          <p:cNvPr id="17" name="TextBox 16"/>
+          <p:cNvSpPr txBox="1"/>
+          <p:nvPr/>
+        </p:nvSpPr>
+        <p:spPr>
+          <a:xfrm>
+            <a:off x="8248079" y="1080000"/>
+            <a:ext cx="3512039" cy="216000"/>
+          </a:xfrm>
+          <a:prstGeom prst="rect">
+            <a:avLst/>
+          </a:prstGeom>
+          <a:noFill/>
+        </p:spPr>
+        <p:txBody>
+          <a:bodyPr wrap="square">
+            <a:spAutoFit/>
+          </a:bodyPr>
+          <a:lstStyle/>
+          <a:p>
+            <a:pPr algn="l"/>
+            <a:r>
+              <a:rPr sz="1600" b="1">
+                <a:solidFill>
+                  <a:srgbClr val="FFFFFF"/>
+                </a:solidFill>
+                <a:latin typeface="Calibri"/>
+              </a:rPr>
+              <a:t>Инфраструктура</a:t>
+            </a:r>
+          </a:p>
+        </p:txBody>
+      </p:sp>
+      <p:sp>
+        <p:nvSpPr>
+          <p:cNvPr id="18" name="TextBox 17"/>
+          <p:cNvSpPr txBox="1"/>
+          <p:nvPr/>
+        </p:nvSpPr>
+        <p:spPr>
+          <a:xfrm>
+            <a:off x="8284079" y="1440000"/>
+            <a:ext cx="3440039" cy="4372201"/>
+          </a:xfrm>
+          <a:prstGeom prst="rect">
+            <a:avLst/>
+          </a:prstGeom>
+          <a:noFill/>
+        </p:spPr>
+        <p:txBody>
+          <a:bodyPr wrap="square">
+            <a:spAutoFit/>
+          </a:bodyPr>
+          <a:lstStyle/>
+          <a:p>
+            <a:pPr>
+              <a:spcAft>
+                <a:spcPts val="400"/>
+              </a:spcAft>
+            </a:pPr>
+            <a:r>
+              <a:rPr sz="1600">
+                <a:solidFill>
+                  <a:srgbClr val="1A1F2B"/>
+                </a:solidFill>
+                <a:latin typeface="Calibri"/>
+              </a:rPr>
+              <a:t>•  PostgreSQL 16</a:t>
+            </a:r>
+          </a:p>
+          <a:p>
+            <a:pPr>
+              <a:spcAft>
+                <a:spcPts val="400"/>
+              </a:spcAft>
+            </a:pPr>
+            <a:r>
+              <a:rPr sz="1600">
+                <a:solidFill>
+                  <a:srgbClr val="1A1F2B"/>
+                </a:solidFill>
+                <a:latin typeface="Calibri"/>
+              </a:rPr>
+              <a:t>•  Redis 7</a:t>
+            </a:r>
+          </a:p>
+          <a:p>
+            <a:pPr>
+              <a:spcAft>
+                <a:spcPts val="400"/>
+              </a:spcAft>
+            </a:pPr>
+            <a:r>
+              <a:rPr sz="1600">
+                <a:solidFill>
+                  <a:srgbClr val="1A1F2B"/>
+                </a:solidFill>
+                <a:latin typeface="Calibri"/>
+              </a:rPr>
+              <a:t>•  MinIO</a:t>
+            </a:r>
+          </a:p>
+          <a:p>
+            <a:pPr>
+              <a:spcAft>
+                <a:spcPts val="400"/>
+              </a:spcAft>
+            </a:pPr>
+            <a:r>
+              <a:rPr sz="1600">
+                <a:solidFill>
+                  <a:srgbClr val="1A1F2B"/>
+                </a:solidFill>
+                <a:latin typeface="Calibri"/>
+              </a:rPr>
+              <a:t>•  Docker Compose</a:t>
+            </a:r>
+          </a:p>
+          <a:p>
+            <a:pPr>
+              <a:spcAft>
+                <a:spcPts val="400"/>
+              </a:spcAft>
+            </a:pPr>
+            <a:r>
+              <a:rPr sz="1600">
+                <a:solidFill>
+                  <a:srgbClr val="1A1F2B"/>
+                </a:solidFill>
+                <a:latin typeface="Calibri"/>
+              </a:rPr>
+              <a:t>•  Traefik</a:t>
+            </a:r>
+          </a:p>
+          <a:p>
+            <a:pPr>
+              <a:spcAft>
+                <a:spcPts val="400"/>
+              </a:spcAft>
+            </a:pPr>
+            <a:r>
+              <a:rPr sz="1600">
+                <a:solidFill>
+                  <a:srgbClr val="1A1F2B"/>
+                </a:solidFill>
+                <a:latin typeface="Calibri"/>
+              </a:rPr>
+              <a:t>•  Prometheus</a:t>
+            </a:r>
+          </a:p>
+        </p:txBody>
+      </p:sp>
+      <p:sp>
+        <p:nvSpPr>
+          <p:cNvPr id="19" name="TextBox 18"/>
           <p:cNvSpPr txBox="1"/>
           <p:nvPr/>
         </p:nvSpPr>
@@ -10916,7 +10885,7 @@
       </p:sp>
       <p:sp>
         <p:nvSpPr>
-          <p:cNvPr id="10" name="TextBox 9"/>
+          <p:cNvPr id="20" name="TextBox 19"/>
           <p:cNvSpPr txBox="1"/>
           <p:nvPr/>
         </p:nvSpPr>
@@ -10982,7 +10951,7 @@
             <a:avLst/>
           </a:prstGeom>
           <a:solidFill>
-            <a:srgbClr val="FFFFFF"/>
+            <a:srgbClr val="0F2D52"/>
           </a:solidFill>
           <a:ln>
             <a:noFill/>
@@ -11019,86 +10988,8 @@
         </p:nvSpPr>
         <p:spPr>
           <a:xfrm>
-            <a:off x="0" y="0"/>
-            <a:ext cx="12192119" cy="576000"/>
-          </a:xfrm>
-          <a:prstGeom prst="rect">
-            <a:avLst/>
-          </a:prstGeom>
-          <a:solidFill>
-            <a:srgbClr val="0F2D52"/>
-          </a:solidFill>
-          <a:ln>
-            <a:noFill/>
-          </a:ln>
-        </p:spPr>
-        <p:style>
-          <a:lnRef idx="1">
-            <a:schemeClr val="accent1"/>
-          </a:lnRef>
-          <a:fillRef idx="3">
-            <a:schemeClr val="accent1"/>
-          </a:fillRef>
-          <a:effectRef idx="2">
-            <a:schemeClr val="accent1"/>
-          </a:effectRef>
-          <a:fontRef idx="minor">
-            <a:schemeClr val="lt1"/>
-          </a:fontRef>
-        </p:style>
-        <p:txBody>
-          <a:bodyPr rtlCol="0" anchor="ctr"/>
-          <a:lstStyle/>
-          <a:p>
-            <a:pPr algn="ctr"/>
-          </a:p>
-        </p:txBody>
-      </p:sp>
-      <p:sp>
-        <p:nvSpPr>
-          <p:cNvPr id="4" name="TextBox 3"/>
-          <p:cNvSpPr txBox="1"/>
-          <p:nvPr/>
-        </p:nvSpPr>
-        <p:spPr>
-          <a:xfrm>
-            <a:off x="288000" y="54000"/>
-            <a:ext cx="11616119" cy="503999"/>
-          </a:xfrm>
-          <a:prstGeom prst="rect">
-            <a:avLst/>
-          </a:prstGeom>
-          <a:noFill/>
-        </p:spPr>
-        <p:txBody>
-          <a:bodyPr wrap="square" tIns="0" bIns="0">
-            <a:spAutoFit/>
-          </a:bodyPr>
-          <a:lstStyle/>
-          <a:p>
-            <a:pPr algn="l"/>
-            <a:r>
-              <a:rPr sz="2200" b="1">
-                <a:solidFill>
-                  <a:srgbClr val="FFFFFF"/>
-                </a:solidFill>
-                <a:latin typeface="Calibri"/>
-              </a:rPr>
-              <a:t>Модель данных и многоарендность</a:t>
-            </a:r>
-          </a:p>
-        </p:txBody>
-      </p:sp>
-      <p:sp>
-        <p:nvSpPr>
-          <p:cNvPr id="5" name="Rectangle 4"/>
-          <p:cNvSpPr/>
-          <p:nvPr/>
-        </p:nvSpPr>
-        <p:spPr>
-          <a:xfrm>
-            <a:off x="0" y="576000"/>
-            <a:ext cx="12192119" cy="28800"/>
+            <a:off x="720000" y="2736000"/>
+            <a:ext cx="1260000" cy="64800"/>
           </a:xfrm>
           <a:prstGeom prst="rect">
             <a:avLst/>
@@ -11134,14 +11025,14 @@
       </p:sp>
       <p:sp>
         <p:nvSpPr>
-          <p:cNvPr id="6" name="TextBox 5"/>
+          <p:cNvPr id="4" name="TextBox 3"/>
           <p:cNvSpPr txBox="1"/>
           <p:nvPr/>
         </p:nvSpPr>
         <p:spPr>
           <a:xfrm>
-            <a:off x="288000" y="666000"/>
-            <a:ext cx="11616119" cy="324000"/>
+            <a:off x="720000" y="2160000"/>
+            <a:ext cx="10752119" cy="503999"/>
           </a:xfrm>
           <a:prstGeom prst="rect">
             <a:avLst/>
@@ -11156,51 +11047,27 @@
           <a:p>
             <a:pPr algn="l"/>
             <a:r>
-              <a:rPr sz="1400" b="0">
-                <a:solidFill>
-                  <a:srgbClr val="555C66"/>
-                </a:solidFill>
-                <a:latin typeface="Calibri"/>
-              </a:rPr>
-              <a:t>ER-схема и изоляция через Row-Level Security</a:t>
-            </a:r>
-          </a:p>
-        </p:txBody>
-      </p:sp>
-      <p:pic>
-        <p:nvPicPr>
-          <p:cNvPr id="7" name="Picture 6" descr="er.png"/>
-          <p:cNvPicPr>
-            <a:picLocks noChangeAspect="1"/>
-          </p:cNvPicPr>
-          <p:nvPr/>
-        </p:nvPicPr>
-        <p:blipFill>
-          <a:blip r:embed="rId2"/>
-          <a:stretch>
-            <a:fillRect/>
-          </a:stretch>
-        </p:blipFill>
-        <p:spPr>
-          <a:xfrm>
-            <a:off x="324000" y="1044000"/>
-            <a:ext cx="7157353" cy="5418000"/>
-          </a:xfrm>
-          <a:prstGeom prst="rect">
-            <a:avLst/>
-          </a:prstGeom>
-        </p:spPr>
-      </p:pic>
-      <p:sp>
-        <p:nvSpPr>
-          <p:cNvPr id="8" name="TextBox 7"/>
+              <a:rPr sz="2200" b="1">
+                <a:solidFill>
+                  <a:srgbClr val="1F77B4"/>
+                </a:solidFill>
+                <a:latin typeface="Calibri"/>
+              </a:rPr>
+              <a:t>ГЛАВА 2</a:t>
+            </a:r>
+          </a:p>
+        </p:txBody>
+      </p:sp>
+      <p:sp>
+        <p:nvSpPr>
+          <p:cNvPr id="5" name="TextBox 4"/>
           <p:cNvSpPr txBox="1"/>
           <p:nvPr/>
         </p:nvSpPr>
         <p:spPr>
           <a:xfrm>
-            <a:off x="7827677" y="1116000"/>
-            <a:ext cx="4040441" cy="5274000"/>
+            <a:off x="720000" y="2951999"/>
+            <a:ext cx="10752119" cy="1080000"/>
           </a:xfrm>
           <a:prstGeom prst="rect">
             <a:avLst/>
@@ -11213,90 +11080,55 @@
           </a:bodyPr>
           <a:lstStyle/>
           <a:p>
-            <a:pPr algn="l">
-              <a:spcAft>
-                <a:spcPts val="600"/>
-              </a:spcAft>
-            </a:pPr>
-            <a:r>
-              <a:rPr sz="1500">
-                <a:solidFill>
-                  <a:srgbClr val="1A1F2B"/>
-                </a:solidFill>
-                <a:latin typeface="Calibri"/>
-              </a:rPr>
-              <a:t>•  12 таблиц, все доменные сущности привязаны к tenants(id).</a:t>
-            </a:r>
-          </a:p>
-          <a:p>
-            <a:pPr algn="l">
-              <a:spcAft>
-                <a:spcPts val="600"/>
-              </a:spcAft>
-            </a:pPr>
-            <a:r>
-              <a:rPr sz="1500">
-                <a:solidFill>
-                  <a:srgbClr val="1A1F2B"/>
-                </a:solidFill>
-                <a:latin typeface="Calibri"/>
-              </a:rPr>
-              <a:t>•  tenant_id обязателен и индексирован — без него любой запрос отклоняется RLS-политикой.</a:t>
-            </a:r>
-          </a:p>
-          <a:p>
-            <a:pPr algn="l">
-              <a:spcAft>
-                <a:spcPts val="600"/>
-              </a:spcAft>
-            </a:pPr>
-            <a:r>
-              <a:rPr sz="1500">
-                <a:solidFill>
-                  <a:srgbClr val="1A1F2B"/>
-                </a:solidFill>
-                <a:latin typeface="Calibri"/>
-              </a:rPr>
-              <a:t>•  UUID-первичные ключи, FK с ON DELETE CASCADE для целостности.</a:t>
-            </a:r>
-          </a:p>
-          <a:p>
-            <a:pPr algn="l">
-              <a:spcAft>
-                <a:spcPts val="600"/>
-              </a:spcAft>
-            </a:pPr>
-            <a:r>
-              <a:rPr sz="1500">
-                <a:solidFill>
-                  <a:srgbClr val="1A1F2B"/>
-                </a:solidFill>
-                <a:latin typeface="Calibri"/>
-              </a:rPr>
-              <a:t>•  Полнотекстовый поиск по issues через tsvector + GIN-индекс.</a:t>
-            </a:r>
-          </a:p>
-          <a:p>
-            <a:pPr algn="l">
-              <a:spcAft>
-                <a:spcPts val="600"/>
-              </a:spcAft>
-            </a:pPr>
-            <a:r>
-              <a:rPr sz="1500">
-                <a:solidFill>
-                  <a:srgbClr val="1A1F2B"/>
-                </a:solidFill>
-                <a:latin typeface="Calibri"/>
-              </a:rPr>
-              <a:t>•  Fractional indexing (column_position) для drag-and-drop без массовых апдейтов.</a:t>
-            </a:r>
-          </a:p>
-        </p:txBody>
-      </p:sp>
-      <p:sp>
-        <p:nvSpPr>
-          <p:cNvPr id="9" name="TextBox 8"/>
+            <a:r>
+              <a:rPr sz="4400" b="1">
+                <a:solidFill>
+                  <a:srgbClr val="FFFFFF"/>
+                </a:solidFill>
+                <a:latin typeface="Calibri"/>
+              </a:rPr>
+              <a:t>Практическая часть</a:t>
+            </a:r>
+          </a:p>
+        </p:txBody>
+      </p:sp>
+      <p:sp>
+        <p:nvSpPr>
+          <p:cNvPr id="6" name="TextBox 5"/>
+          <p:cNvSpPr txBox="1"/>
+          <p:nvPr/>
+        </p:nvSpPr>
+        <p:spPr>
+          <a:xfrm>
+            <a:off x="720000" y="4320000"/>
+            <a:ext cx="10752119" cy="1080000"/>
+          </a:xfrm>
+          <a:prstGeom prst="rect">
+            <a:avLst/>
+          </a:prstGeom>
+          <a:noFill/>
+        </p:spPr>
+        <p:txBody>
+          <a:bodyPr wrap="square">
+            <a:spAutoFit/>
+          </a:bodyPr>
+          <a:lstStyle/>
+          <a:p>
+            <a:r>
+              <a:rPr sz="1800">
+                <a:solidFill>
+                  <a:srgbClr val="F2F5F9"/>
+                </a:solidFill>
+                <a:latin typeface="Calibri"/>
+              </a:rPr>
+              <a:t>Разработка прототипа TaskHub: требования, архитектура, модель данных, поведение системы и развёртывание.</a:t>
+            </a:r>
+          </a:p>
+        </p:txBody>
+      </p:sp>
+      <p:sp>
+        <p:nvSpPr>
+          <p:cNvPr id="7" name="TextBox 6"/>
           <p:cNvSpPr txBox="1"/>
           <p:nvPr/>
         </p:nvSpPr>
@@ -11316,11 +11148,10 @@
           </a:bodyPr>
           <a:lstStyle/>
           <a:p>
-            <a:pPr algn="l"/>
             <a:r>
               <a:rPr sz="1000">
                 <a:solidFill>
-                  <a:srgbClr val="555C66"/>
+                  <a:srgbClr val="F2F5F9"/>
                 </a:solidFill>
                 <a:latin typeface="Calibri"/>
               </a:rPr>
@@ -11331,7 +11162,7 @@
       </p:sp>
       <p:sp>
         <p:nvSpPr>
-          <p:cNvPr id="10" name="TextBox 9"/>
+          <p:cNvPr id="8" name="TextBox 7"/>
           <p:cNvSpPr txBox="1"/>
           <p:nvPr/>
         </p:nvSpPr>
@@ -11355,7 +11186,7 @@
             <a:r>
               <a:rPr sz="1000">
                 <a:solidFill>
-                  <a:srgbClr val="555C66"/>
+                  <a:srgbClr val="F2F5F9"/>
                 </a:solidFill>
                 <a:latin typeface="Calibri"/>
               </a:rPr>

--- a/docs/coursework/Презентация_TaskHub.pptx
+++ b/docs/coursework/Презентация_TaskHub.pptx
@@ -4224,7 +4224,7 @@
               </a:spcAft>
             </a:pPr>
             <a:r>
-              <a:rPr sz="1700">
+              <a:rPr sz="1500">
                 <a:solidFill>
                   <a:srgbClr val="1A1F2B"/>
                 </a:solidFill>
@@ -4240,13 +4240,13 @@
               </a:spcAft>
             </a:pPr>
             <a:r>
-              <a:rPr sz="1700">
+              <a:rPr sz="1500">
                 <a:solidFill>
                   <a:srgbClr val="1A1F2B"/>
                 </a:solidFill>
                 <a:latin typeface="Calibri"/>
               </a:rPr>
-              <a:t>•  Backend: NestJS + TypeORM, 9 модулей (Auth, Tenants, Users, Projects, Issues, Search, Notifications, Mail, Health).</a:t>
+              <a:t>•  Backend: NestJS + TypeORM, 10 модулей (Auth, Tenants, Users, Projects, Issues, Search, Notifications, Health, Billing, Redis).</a:t>
             </a:r>
           </a:p>
           <a:p>
@@ -4256,7 +4256,7 @@
               </a:spcAft>
             </a:pPr>
             <a:r>
-              <a:rPr sz="1700">
+              <a:rPr sz="1500">
                 <a:solidFill>
                   <a:srgbClr val="1A1F2B"/>
                 </a:solidFill>
@@ -4272,13 +4272,13 @@
               </a:spcAft>
             </a:pPr>
             <a:r>
-              <a:rPr sz="1700">
+              <a:rPr sz="1500">
                 <a:solidFill>
                   <a:srgbClr val="1A1F2B"/>
                 </a:solidFill>
                 <a:latin typeface="Calibri"/>
               </a:rPr>
-              <a:t>•  Реал-тайм: WebSocket (Socket.IO) + EventEmitter для развязки слоёв.</a:t>
+              <a:t>•  Биллинг: YooKassa-интеграция + PlanGuard, ограничения по тарифам (projects/users/issues).</a:t>
             </a:r>
           </a:p>
           <a:p>
@@ -4288,7 +4288,23 @@
               </a:spcAft>
             </a:pPr>
             <a:r>
-              <a:rPr sz="1700">
+              <a:rPr sz="1500">
+                <a:solidFill>
+                  <a:srgbClr val="1A1F2B"/>
+                </a:solidFill>
+                <a:latin typeface="Calibri"/>
+              </a:rPr>
+              <a:t>•  Реал-тайм: WebSocket (Socket.IO) + EventEmitter для развязки слоёв.</a:t>
+            </a:r>
+          </a:p>
+          <a:p>
+            <a:pPr algn="l">
+              <a:spcAft>
+                <a:spcPts val="600"/>
+              </a:spcAft>
+            </a:pPr>
+            <a:r>
+              <a:rPr sz="1500">
                 <a:solidFill>
                   <a:srgbClr val="1A1F2B"/>
                 </a:solidFill>
@@ -6313,7 +6329,7 @@
                 </a:solidFill>
                 <a:latin typeface="Calibri"/>
               </a:rPr>
-              <a:t>•  Облачные сервисы (Jira, Asana, Linear) — vendor lock-in, рост стоимости лицензий, требования к локализации данных.</a:t>
+              <a:t>•  Зарубежные SaaS (Jira, Asana, Linear) — vendor lock-in, рост стоимости лицензий, требования к локализации данных и платежам.</a:t>
             </a:r>
           </a:p>
           <a:p>
@@ -6329,7 +6345,7 @@
                 </a:solidFill>
                 <a:latin typeface="Calibri"/>
               </a:rPr>
-              <a:t>•  Тренд на self-hosted решения с поддержкой multi-tenant изоляции.</a:t>
+              <a:t>•  B2B-SaaS как продуктовая модель: multi-tenant изоляция + тарифные планы + интеграция с локальной платёжной системой.</a:t>
             </a:r>
           </a:p>
           <a:p>
@@ -6345,7 +6361,7 @@
                 </a:solidFill>
                 <a:latin typeface="Calibri"/>
               </a:rPr>
-              <a:t>•  Современный стек (NestJS, React, PostgreSQL) делает разработку прототипа реалистичной задачей курсовой работы.</a:t>
+              <a:t>•  Современный стек (NestJS, React, PostgreSQL) делает разработку такого прототипа реалистичной задачей курсовой работы.</a:t>
             </a:r>
           </a:p>
         </p:txBody>
@@ -6479,7 +6495,7 @@
                 </a:solidFill>
                 <a:latin typeface="Calibri"/>
               </a:rPr>
-              <a:t>multi-tenant</a:t>
+              <a:t>4 тарифа</a:t>
             </a:r>
           </a:p>
           <a:p>
@@ -6490,7 +6506,7 @@
                 </a:solidFill>
                 <a:latin typeface="Calibri"/>
               </a:rPr>
-              <a:t>ключевое требование к B2B-SaaS</a:t>
+              <a:t>FREE · BASIC · PRO · ENTERPRISE</a:t>
             </a:r>
           </a:p>
           <a:p>
@@ -6517,7 +6533,7 @@
                 </a:solidFill>
                 <a:latin typeface="Calibri"/>
               </a:rPr>
-              <a:t>механизм изоляции в PostgreSQL</a:t>
+              <a:t>механизм изоляции арендаторов в PostgreSQL</a:t>
             </a:r>
           </a:p>
         </p:txBody>
@@ -7790,7 +7806,7 @@
                 </a:solidFill>
                 <a:latin typeface="Calibri"/>
               </a:rPr>
-              <a:t>SaaS / on-premise / self-hosted</a:t>
+              <a:t>SaaS · on-premise · self-hosted</a:t>
             </a:r>
           </a:p>
           <a:p>
@@ -7856,7 +7872,7 @@
                 </a:solidFill>
                 <a:latin typeface="Calibri"/>
               </a:rPr>
-              <a:t>По интеграции:  </a:t>
+              <a:t>Монетизация:  </a:t>
             </a:r>
             <a:r>
               <a:rPr sz="1400">
@@ -7865,7 +7881,7 @@
                 </a:solidFill>
                 <a:latin typeface="Calibri"/>
               </a:rPr>
-              <a:t>Standalone · DevOps-стек</a:t>
+              <a:t>Free · Freemium · Subscription</a:t>
             </a:r>
           </a:p>
         </p:txBody>
@@ -8220,7 +8236,7 @@
                           </a:solidFill>
                           <a:latin typeface="Calibri"/>
                         </a:rPr>
-                        <a:t>Self-hosted</a:t>
+                        <a:t>Поставка</a:t>
                       </a:r>
                     </a:p>
                   </a:txBody>
@@ -8266,7 +8282,7 @@
                           </a:solidFill>
                           <a:latin typeface="Calibri"/>
                         </a:rPr>
-                        <a:t>Открытый код</a:t>
+                        <a:t>Тарифы</a:t>
                       </a:r>
                     </a:p>
                   </a:txBody>
@@ -8337,7 +8353,7 @@
                           </a:solidFill>
                           <a:latin typeface="Calibri"/>
                         </a:rPr>
-                        <a:t>DC (платно)</a:t>
+                        <a:t>Cloud + DC</a:t>
                       </a:r>
                     </a:p>
                   </a:txBody>
@@ -8383,7 +8399,7 @@
                           </a:solidFill>
                           <a:latin typeface="Calibri"/>
                         </a:rPr>
-                        <a:t>Нет</a:t>
+                        <a:t>Per-user</a:t>
                       </a:r>
                     </a:p>
                   </a:txBody>
@@ -8500,7 +8516,7 @@
                           </a:solidFill>
                           <a:latin typeface="Calibri"/>
                         </a:rPr>
-                        <a:t>Нет</a:t>
+                        <a:t>С GitHub</a:t>
                       </a:r>
                     </a:p>
                   </a:txBody>
@@ -8617,7 +8633,7 @@
                           </a:solidFill>
                           <a:latin typeface="Calibri"/>
                         </a:rPr>
-                        <a:t>Нет</a:t>
+                        <a:t>Free / Premium</a:t>
                       </a:r>
                     </a:p>
                   </a:txBody>
@@ -8688,7 +8704,7 @@
                           </a:solidFill>
                           <a:latin typeface="Calibri"/>
                         </a:rPr>
-                        <a:t>Да</a:t>
+                        <a:t>Cloud + on-prem</a:t>
                       </a:r>
                     </a:p>
                   </a:txBody>
@@ -8734,7 +8750,7 @@
                           </a:solidFill>
                           <a:latin typeface="Calibri"/>
                         </a:rPr>
-                        <a:t>Нет</a:t>
+                        <a:t>Per-user</a:t>
                       </a:r>
                     </a:p>
                   </a:txBody>
@@ -8805,7 +8821,7 @@
                           </a:solidFill>
                           <a:latin typeface="Calibri"/>
                         </a:rPr>
-                        <a:t>Да</a:t>
+                        <a:t>On-prem</a:t>
                       </a:r>
                     </a:p>
                   </a:txBody>
@@ -8851,7 +8867,7 @@
                           </a:solidFill>
                           <a:latin typeface="Calibri"/>
                         </a:rPr>
-                        <a:t>Да</a:t>
+                        <a:t>Community / Ent.</a:t>
                       </a:r>
                     </a:p>
                   </a:txBody>
@@ -8922,7 +8938,7 @@
                           </a:solidFill>
                           <a:latin typeface="Calibri"/>
                         </a:rPr>
-                        <a:t>Да</a:t>
+                        <a:t>On-prem (Docker)</a:t>
                       </a:r>
                     </a:p>
                   </a:txBody>
@@ -8968,7 +8984,7 @@
                           </a:solidFill>
                           <a:latin typeface="Calibri"/>
                         </a:rPr>
-                        <a:t>Да</a:t>
+                        <a:t>4 плана + YooKassa</a:t>
                       </a:r>
                     </a:p>
                   </a:txBody>
